--- a/curso/pptx/S84.pptx
+++ b/curso/pptx/S84.pptx
@@ -3800,7 +3800,7 @@
                 </a:solidFill>
                 <a:latin typeface="Nunito Sans"/>
               </a:rPr>
-              <a:t>Maialen viaja con su familia a otro país. Allí cenan a las seis de la tarde. Su padre comenta: «Qué gente más rara, cenar a esas horas no es normal».</a:t>
+              <a:t>Una chica viaja con su familia a otro país. Allí cenan a las seis de la tarde. Su padre comenta: «Qué gente más rara, cenar a esas horas no es normal».</a:t>
             </a:r>
           </a:p>
         </p:txBody>
@@ -4109,7 +4109,7 @@
                 </a:solidFill>
                 <a:latin typeface="Nunito Sans"/>
               </a:rPr>
-              <a:t>Vuelve el caso del principio: en casa de Chen se quitan los zapatos al entrar; en casa de Iker, no. ¿Cuál lo hace bien?</a:t>
+              <a:t>Vuelve el caso del principio: en casa de un chico se quitan los zapatos al entrar; en casa de otro, no. ¿Cuál lo hace bien?</a:t>
             </a:r>
           </a:p>
         </p:txBody>
@@ -6694,7 +6694,7 @@
                 </a:solidFill>
                 <a:latin typeface="Nunito Sans"/>
               </a:rPr>
-              <a:t>En casa de Chen todos se quitan los zapatos al entrar. En casa de Iker, nadie. La primera vez, Iker se quedó parado en la puerta de Chen.</a:t>
+              <a:t>En casa de un chico todos se quitan los zapatos al entrar. En casa de otro, nadie. La primera vez, el segundo se quedó parado en la puerta del primero.</a:t>
             </a:r>
           </a:p>
         </p:txBody>

--- a/curso/pptx/S84.pptx
+++ b/curso/pptx/S84.pptx
@@ -22,7 +22,6 @@
     <p:sldId id="270" r:id="rId22"/>
     <p:sldId id="271" r:id="rId23"/>
     <p:sldId id="272" r:id="rId24"/>
-    <p:sldId id="273" r:id="rId25"/>
   </p:sldIdLst>
   <p:sldSz cx="12192000" cy="6858000" type="screen4x3"/>
   <p:notesSz cx="6858000" cy="9144000"/>
@@ -3536,7 +3535,7 @@
                 </a:solidFill>
                 <a:latin typeface="Nunito Sans"/>
               </a:rPr>
-              <a:t>PENSAMIENTO CRÍTICO · SESIÓN 84 · UNIDAD 19 · GLOCAL: CULTURAS Y MIGRACIONES</a:t>
+              <a:t>PENSAMIENTO CRÍTICO · SESIÓN 84 · UNIDAD 19 · MODAS, OCIO Y FUTURO</a:t>
             </a:r>
           </a:p>
         </p:txBody>
@@ -3575,7 +3574,7 @@
                 </a:solidFill>
                 <a:latin typeface="Fredoka"/>
               </a:rPr>
-              <a:t>¿Qué es una cultura?</a:t>
+              <a:t>¿Por qué seguimos las modas?</a:t>
             </a:r>
           </a:p>
         </p:txBody>
@@ -3614,7 +3613,7 @@
                 </a:solidFill>
                 <a:latin typeface="Nunito Sans"/>
               </a:rPr>
-              <a:t>Una cultura es la forma de vivir que un grupo aprende y comparte; respetarla no obliga a aceptar lo que daña a las personas.</a:t>
+              <a:t>Seguimos las modas para pertenecer y para distinguirnos; pensar bien es ver por qué las sigo y separar lo que se lleva de lo bueno.</a:t>
             </a:r>
           </a:p>
         </p:txBody>
@@ -3718,7 +3717,7 @@
                 </a:solidFill>
                 <a:latin typeface="Fredoka"/>
               </a:rPr>
-              <a:t>Caso 1 · Cenar a las seis</a:t>
+              <a:t>Caso 1 · La sudadera de la cuadrilla</a:t>
             </a:r>
           </a:p>
         </p:txBody>
@@ -3800,7 +3799,7 @@
                 </a:solidFill>
                 <a:latin typeface="Nunito Sans"/>
               </a:rPr>
-              <a:t>Una chica viaja con su familia a otro país. Allí cenan a las seis de la tarde. Su padre comenta: «Qué gente más rara, cenar a esas horas no es normal».</a:t>
+              <a:t>Toda la cuadrilla de una chica lleva la misma sudadera. A ella no le encanta, pero la pide para su cumpleaños. (Ejemplo inventado.)</a:t>
             </a:r>
           </a:p>
         </p:txBody>
@@ -3848,7 +3847,25 @@
                 </a:solidFill>
                 <a:latin typeface="Nunito Sans"/>
               </a:rPr>
-              <a:t>El padre mide la costumbre de otros con la suya: en Euskadi se cena tarde.</a:t>
+              <a:t>¿Por qué la quiere? No por la sudadera: por </a:t>
+            </a:r>
+            <a:r>
+              <a:rPr sz="2400" b="1">
+                <a:solidFill>
+                  <a:srgbClr val="1F2A44"/>
+                </a:solidFill>
+                <a:latin typeface="Nunito Sans"/>
+              </a:rPr>
+              <a:t>pertenecer</a:t>
+            </a:r>
+            <a:r>
+              <a:rPr sz="2400" b="0">
+                <a:solidFill>
+                  <a:srgbClr val="1F2A44"/>
+                </a:solidFill>
+                <a:latin typeface="Nunito Sans"/>
+              </a:rPr>
+              <a:t> al grupo.</a:t>
             </a:r>
           </a:p>
           <a:p>
@@ -3873,7 +3890,7 @@
                 </a:solidFill>
                 <a:latin typeface="Nunito Sans"/>
               </a:rPr>
-              <a:t>Para ellos, los raros somos nosotros: cenamos a las nueve o a las diez.</a:t>
+              <a:t>Querer pertenecer es muy humano. No es un error ni una tontería.</a:t>
             </a:r>
           </a:p>
           <a:p>
@@ -3898,7 +3915,7 @@
                 </a:solidFill>
                 <a:latin typeface="Nunito Sans"/>
               </a:rPr>
-              <a:t>Nadie sale dañado por cenar a una hora u otra. Es solo una diferencia.</a:t>
+              <a:t>La pregunta crítica: ¿la quiero por lo que es o por lo que dice de mí?</a:t>
             </a:r>
           </a:p>
           <a:p>
@@ -3923,7 +3940,7 @@
                 </a:solidFill>
                 <a:latin typeface="Nunito Sans"/>
               </a:rPr>
-              <a:t>Conclusión: es etnocentrismo. Juzgar lo distinto como raro solo porque no es lo mío.</a:t>
+              <a:t>Conclusión: seguir una moda puede estar bien. Lo importante es saber por qué la sigo.</a:t>
             </a:r>
           </a:p>
         </p:txBody>
@@ -4027,7 +4044,7 @@
                 </a:solidFill>
                 <a:latin typeface="Fredoka"/>
               </a:rPr>
-              <a:t>Caso 2 · Los zapatos en la puerta</a:t>
+              <a:t>Caso 2 · «Si todos las llevan, serán las mejores»</a:t>
             </a:r>
           </a:p>
         </p:txBody>
@@ -4109,7 +4126,7 @@
                 </a:solidFill>
                 <a:latin typeface="Nunito Sans"/>
               </a:rPr>
-              <a:t>Vuelve el caso del principio: en casa de un chico se quitan los zapatos al entrar; en casa de otro, no. ¿Cuál lo hace bien?</a:t>
+              <a:t>Un chico va a correr la carrera del instituto con unas zapatillas de moda: «Las lleva todo el mundo, así que serán las mejores para correr».</a:t>
             </a:r>
           </a:p>
         </p:txBody>
@@ -4157,7 +4174,25 @@
                 </a:solidFill>
                 <a:latin typeface="Nunito Sans"/>
               </a:rPr>
-              <a:t>¿Hay alguien dañado en alguna de las dos casas? No.</a:t>
+              <a:t>Es la </a:t>
+            </a:r>
+            <a:r>
+              <a:rPr sz="2400" b="1">
+                <a:solidFill>
+                  <a:srgbClr val="1F2A44"/>
+                </a:solidFill>
+                <a:latin typeface="Nunito Sans"/>
+              </a:rPr>
+              <a:t>prueba social</a:t>
+            </a:r>
+            <a:r>
+              <a:rPr sz="2400" b="0">
+                <a:solidFill>
+                  <a:srgbClr val="1F2A44"/>
+                </a:solidFill>
+                <a:latin typeface="Nunito Sans"/>
+              </a:rPr>
+              <a:t> (sesión 9): copiar a los demás cuando no sabemos qué hacer.</a:t>
             </a:r>
           </a:p>
           <a:p>
@@ -4182,7 +4217,43 @@
                 </a:solidFill>
                 <a:latin typeface="Nunito Sans"/>
               </a:rPr>
-              <a:t>Cada costumbre tiene sus razones: limpieza, comodidad, respeto al hogar.</a:t>
+              <a:t>Pero la moda dice qué </a:t>
+            </a:r>
+            <a:r>
+              <a:rPr sz="2400" b="1">
+                <a:solidFill>
+                  <a:srgbClr val="1F2A44"/>
+                </a:solidFill>
+                <a:latin typeface="Nunito Sans"/>
+              </a:rPr>
+              <a:t>se lleva</a:t>
+            </a:r>
+            <a:r>
+              <a:rPr sz="2400" b="0">
+                <a:solidFill>
+                  <a:srgbClr val="1F2A44"/>
+                </a:solidFill>
+                <a:latin typeface="Nunito Sans"/>
+              </a:rPr>
+              <a:t>, no qué es </a:t>
+            </a:r>
+            <a:r>
+              <a:rPr sz="2400" b="1">
+                <a:solidFill>
+                  <a:srgbClr val="1F2A44"/>
+                </a:solidFill>
+                <a:latin typeface="Nunito Sans"/>
+              </a:rPr>
+              <a:t>bueno</a:t>
+            </a:r>
+            <a:r>
+              <a:rPr sz="2400" b="0">
+                <a:solidFill>
+                  <a:srgbClr val="1F2A44"/>
+                </a:solidFill>
+                <a:latin typeface="Nunito Sans"/>
+              </a:rPr>
+              <a:t> para correr.</a:t>
             </a:r>
           </a:p>
           <a:p>
@@ -4207,7 +4278,7 @@
                 </a:solidFill>
                 <a:latin typeface="Nunito Sans"/>
               </a:rPr>
-              <a:t>Lo razonable es fijarse y adaptarse cuando vas de invitado.</a:t>
+              <a:t>¿Cómo lo sabe? Mejor preguntar a alguien que corre o buscar pruebas.</a:t>
             </a:r>
           </a:p>
           <a:p>
@@ -4232,7 +4303,7 @@
                 </a:solidFill>
                 <a:latin typeface="Nunito Sans"/>
               </a:rPr>
-              <a:t>Conclusión: ninguna es mejor. Es una diferencia, no un error. Aquí el relativismo cultural funciona bien.</a:t>
+              <a:t>Conclusión: que algo esté de moda es una pista de que gusta, no de que funcione.</a:t>
             </a:r>
           </a:p>
         </p:txBody>
@@ -4246,6 +4317,333 @@
 </file>
 
 <file path=ppt/slides/slide12.xml><?xml version="1.0" encoding="utf-8"?>
+<p:sld xmlns:a="http://schemas.openxmlformats.org/drawingml/2006/main" xmlns:p="http://schemas.openxmlformats.org/presentationml/2006/main" xmlns:r="http://schemas.openxmlformats.org/officeDocument/2006/relationships">
+  <p:cSld>
+    <p:bg>
+      <p:bgPr>
+        <a:solidFill>
+          <a:srgbClr val="FBF7EF"/>
+        </a:solidFill>
+        <a:effectLst/>
+      </p:bgPr>
+    </p:bg>
+    <p:spTree>
+      <p:nvGrpSpPr>
+        <p:cNvPr id="1" name=""/>
+        <p:cNvGrpSpPr/>
+        <p:nvPr/>
+      </p:nvGrpSpPr>
+      <p:grpSpPr/>
+      <p:sp>
+        <p:nvSpPr>
+          <p:cNvPr id="2" name="TextBox 1"/>
+          <p:cNvSpPr txBox="1"/>
+          <p:nvPr/>
+        </p:nvSpPr>
+        <p:spPr>
+          <a:xfrm>
+            <a:off x="640000" y="380000"/>
+            <a:ext cx="10912000" cy="420000"/>
+          </a:xfrm>
+          <a:prstGeom prst="rect">
+            <a:avLst/>
+          </a:prstGeom>
+          <a:noFill/>
+        </p:spPr>
+        <p:txBody>
+          <a:bodyPr wrap="square">
+            <a:spAutoFit/>
+          </a:bodyPr>
+          <a:lstStyle/>
+          <a:p>
+            <a:pPr>
+              <a:spcAft>
+                <a:spcPts val="630"/>
+              </a:spcAft>
+            </a:pPr>
+            <a:r>
+              <a:rPr sz="1400" b="1">
+                <a:solidFill>
+                  <a:srgbClr val="E8793A"/>
+                </a:solidFill>
+                <a:latin typeface="Nunito Sans"/>
+              </a:rPr>
+              <a:t>BLOQUE 2 · CASOS RESUELTOS</a:t>
+            </a:r>
+          </a:p>
+        </p:txBody>
+      </p:sp>
+      <p:sp>
+        <p:nvSpPr>
+          <p:cNvPr id="3" name="TextBox 2"/>
+          <p:cNvSpPr txBox="1"/>
+          <p:nvPr/>
+        </p:nvSpPr>
+        <p:spPr>
+          <a:xfrm>
+            <a:off x="640000" y="760000"/>
+            <a:ext cx="10912000" cy="800000"/>
+          </a:xfrm>
+          <a:prstGeom prst="rect">
+            <a:avLst/>
+          </a:prstGeom>
+          <a:noFill/>
+        </p:spPr>
+        <p:txBody>
+          <a:bodyPr wrap="square">
+            <a:spAutoFit/>
+          </a:bodyPr>
+          <a:lstStyle/>
+          <a:p>
+            <a:pPr>
+              <a:spcAft>
+                <a:spcPts val="1710"/>
+              </a:spcAft>
+            </a:pPr>
+            <a:r>
+              <a:rPr sz="3800" b="1">
+                <a:solidFill>
+                  <a:srgbClr val="1F2A44"/>
+                </a:solidFill>
+                <a:latin typeface="Fredoka"/>
+              </a:rPr>
+              <a:t>Caso 3 · ¿El rosa es de chicas?</a:t>
+            </a:r>
+          </a:p>
+        </p:txBody>
+      </p:sp>
+      <p:sp>
+        <p:nvSpPr>
+          <p:cNvPr id="4" name="Rectangle 3"/>
+          <p:cNvSpPr/>
+          <p:nvPr/>
+        </p:nvSpPr>
+        <p:spPr>
+          <a:xfrm>
+            <a:off x="640000" y="1600000"/>
+            <a:ext cx="10912000" cy="1100000"/>
+          </a:xfrm>
+          <a:prstGeom prst="rect">
+            <a:avLst/>
+          </a:prstGeom>
+          <a:solidFill>
+            <a:srgbClr val="FFFFFF"/>
+          </a:solidFill>
+          <a:ln>
+            <a:noFill/>
+          </a:ln>
+        </p:spPr>
+        <p:style>
+          <a:lnRef idx="1">
+            <a:schemeClr val="accent1"/>
+          </a:lnRef>
+          <a:fillRef idx="3">
+            <a:schemeClr val="accent1"/>
+          </a:fillRef>
+          <a:effectRef idx="2">
+            <a:schemeClr val="accent1"/>
+          </a:effectRef>
+          <a:fontRef idx="minor">
+            <a:schemeClr val="lt1"/>
+          </a:fontRef>
+        </p:style>
+        <p:txBody>
+          <a:bodyPr rtlCol="0" anchor="ctr"/>
+          <a:lstStyle/>
+          <a:p>
+            <a:pPr algn="ctr"/>
+          </a:p>
+        </p:txBody>
+      </p:sp>
+      <p:sp>
+        <p:nvSpPr>
+          <p:cNvPr id="5" name="TextBox 4"/>
+          <p:cNvSpPr txBox="1"/>
+          <p:nvPr/>
+        </p:nvSpPr>
+        <p:spPr>
+          <a:xfrm>
+            <a:off x="840000" y="1650000"/>
+            <a:ext cx="10512000" cy="1000000"/>
+          </a:xfrm>
+          <a:prstGeom prst="rect">
+            <a:avLst/>
+          </a:prstGeom>
+          <a:noFill/>
+        </p:spPr>
+        <p:txBody>
+          <a:bodyPr wrap="square" anchor="ctr">
+            <a:spAutoFit/>
+          </a:bodyPr>
+          <a:lstStyle/>
+          <a:p>
+            <a:pPr>
+              <a:spcAft>
+                <a:spcPts val="1170"/>
+              </a:spcAft>
+            </a:pPr>
+            <a:r>
+              <a:rPr sz="2600" b="1">
+                <a:solidFill>
+                  <a:srgbClr val="1F2A44"/>
+                </a:solidFill>
+                <a:latin typeface="Nunito Sans"/>
+              </a:rPr>
+              <a:t>Un chico dice: «El rosa siempre ha sido de chicas y el azul, de chicos. Es natural».</a:t>
+            </a:r>
+          </a:p>
+        </p:txBody>
+      </p:sp>
+      <p:sp>
+        <p:nvSpPr>
+          <p:cNvPr id="6" name="TextBox 5"/>
+          <p:cNvSpPr txBox="1"/>
+          <p:nvPr/>
+        </p:nvSpPr>
+        <p:spPr>
+          <a:xfrm>
+            <a:off x="640000" y="2900000"/>
+            <a:ext cx="10912000" cy="3500000"/>
+          </a:xfrm>
+          <a:prstGeom prst="rect">
+            <a:avLst/>
+          </a:prstGeom>
+          <a:noFill/>
+        </p:spPr>
+        <p:txBody>
+          <a:bodyPr wrap="square">
+            <a:spAutoFit/>
+          </a:bodyPr>
+          <a:lstStyle/>
+          <a:p>
+            <a:pPr>
+              <a:spcAft>
+                <a:spcPts val="1080"/>
+              </a:spcAft>
+            </a:pPr>
+            <a:r>
+              <a:rPr sz="2400" b="1">
+                <a:solidFill>
+                  <a:srgbClr val="E8793A"/>
+                </a:solidFill>
+                <a:latin typeface="Nunito Sans"/>
+              </a:rPr>
+              <a:t>1. </a:t>
+            </a:r>
+            <a:r>
+              <a:rPr sz="2400" b="0">
+                <a:solidFill>
+                  <a:srgbClr val="1F2A44"/>
+                </a:solidFill>
+                <a:latin typeface="Nunito Sans"/>
+              </a:rPr>
+              <a:t>¿Cómo lo sabe? Mira a su alrededor y generaliza (sesión 25).</a:t>
+            </a:r>
+          </a:p>
+          <a:p>
+            <a:pPr>
+              <a:spcAft>
+                <a:spcPts val="1080"/>
+              </a:spcAft>
+            </a:pPr>
+            <a:r>
+              <a:rPr sz="2400" b="1">
+                <a:solidFill>
+                  <a:srgbClr val="E8793A"/>
+                </a:solidFill>
+                <a:latin typeface="Nunito Sans"/>
+              </a:rPr>
+              <a:t>2. </a:t>
+            </a:r>
+            <a:r>
+              <a:rPr sz="2400" b="0">
+                <a:solidFill>
+                  <a:srgbClr val="1F2A44"/>
+                </a:solidFill>
+                <a:latin typeface="Nunito Sans"/>
+              </a:rPr>
+              <a:t>La historiadora Jo Paoletti cuenta que hace unos cien años algunas tiendas de EE. UU. recomendaban rosa para niños.</a:t>
+            </a:r>
+          </a:p>
+          <a:p>
+            <a:pPr>
+              <a:spcAft>
+                <a:spcPts val="1080"/>
+              </a:spcAft>
+            </a:pPr>
+            <a:r>
+              <a:rPr sz="2400" b="1">
+                <a:solidFill>
+                  <a:srgbClr val="E8793A"/>
+                </a:solidFill>
+                <a:latin typeface="Nunito Sans"/>
+              </a:rPr>
+              <a:t>3. </a:t>
+            </a:r>
+            <a:r>
+              <a:rPr sz="2400" b="0">
+                <a:solidFill>
+                  <a:srgbClr val="1F2A44"/>
+                </a:solidFill>
+                <a:latin typeface="Nunito Sans"/>
+              </a:rPr>
+              <a:t>Y azul para niñas. Los colores «de chico» y «de chica» han cambiado con el tiempo.</a:t>
+            </a:r>
+          </a:p>
+          <a:p>
+            <a:pPr>
+              <a:spcAft>
+                <a:spcPts val="1080"/>
+              </a:spcAft>
+            </a:pPr>
+            <a:r>
+              <a:rPr sz="2400" b="1">
+                <a:solidFill>
+                  <a:srgbClr val="E8793A"/>
+                </a:solidFill>
+                <a:latin typeface="Nunito Sans"/>
+              </a:rPr>
+              <a:t>4. </a:t>
+            </a:r>
+            <a:r>
+              <a:rPr sz="2400" b="0">
+                <a:solidFill>
+                  <a:srgbClr val="1F2A44"/>
+                </a:solidFill>
+                <a:latin typeface="Nunito Sans"/>
+              </a:rPr>
+              <a:t>Conclusión: muchos roles de la moda son </a:t>
+            </a:r>
+            <a:r>
+              <a:rPr sz="2400" b="1">
+                <a:solidFill>
+                  <a:srgbClr val="1F2A44"/>
+                </a:solidFill>
+                <a:latin typeface="Nunito Sans"/>
+              </a:rPr>
+              <a:t>costumbres</a:t>
+            </a:r>
+            <a:r>
+              <a:rPr sz="2400" b="0">
+                <a:solidFill>
+                  <a:srgbClr val="1F2A44"/>
+                </a:solidFill>
+                <a:latin typeface="Nunito Sans"/>
+              </a:rPr>
+              <a:t>, no naturaleza. Cada uno puede vestir como quiera.</a:t>
+            </a:r>
+          </a:p>
+        </p:txBody>
+      </p:sp>
+    </p:spTree>
+  </p:cSld>
+  <p:clrMapOvr>
+    <a:masterClrMapping/>
+  </p:clrMapOvr>
+</p:sld>
+</file>
+
+<file path=ppt/slides/slide13.xml><?xml version="1.0" encoding="utf-8"?>
 <p:sld xmlns:a="http://schemas.openxmlformats.org/drawingml/2006/main" xmlns:p="http://schemas.openxmlformats.org/presentationml/2006/main" xmlns:r="http://schemas.openxmlformats.org/officeDocument/2006/relationships">
   <p:cSld>
     <p:bg>
@@ -4336,7 +4734,7 @@
                 </a:solidFill>
                 <a:latin typeface="Fredoka"/>
               </a:rPr>
-              <a:t>⚠ «Es nuestra tradición»</a:t>
+              <a:t>⚠ «Yo no sigo modas»</a:t>
             </a:r>
           </a:p>
         </p:txBody>
@@ -4418,7 +4816,7 @@
                 </a:solidFill>
                 <a:latin typeface="Nunito Sans"/>
               </a:rPr>
-              <a:t>En un club inventado, a los nuevos se les humilla en público el primer día. Los veteranos dicen: «Es nuestra tradición. Si no la respetas, no respetas nuestra cultura».</a:t>
+              <a:t>Un chico viste siempre de negro, como los fans de su grupo de música favorito. «Yo no sigo modas: los que las siguen son borregos», dice. (Ejemplo inventado.)</a:t>
             </a:r>
           </a:p>
         </p:txBody>
@@ -4466,7 +4864,7 @@
                 </a:solidFill>
                 <a:latin typeface="Nunito Sans"/>
               </a:rPr>
-              <a:t>Es una costumbre del grupo. ¿Hay que respetarla?</a:t>
+              <a:t>¿Está ese chico fuera de las modas?</a:t>
             </a:r>
           </a:p>
           <a:p>
@@ -4491,7 +4889,7 @@
                 </a:solidFill>
                 <a:latin typeface="Nunito Sans"/>
               </a:rPr>
-              <a:t>Parece que sí: hemos dicho que las costumbres distintas se respetan.</a:t>
+              <a:t>Parece que sí: no lleva lo que lleva la mayoría.</a:t>
             </a:r>
           </a:p>
           <a:p>
@@ -4516,7 +4914,7 @@
                 </a:solidFill>
                 <a:latin typeface="Nunito Sans"/>
               </a:rPr>
-              <a:t>Pero aquí hay personas dañadas: se humilla a los nuevos.</a:t>
+              <a:t>Pero viste igual que los fans de su grupo: también se parece a alguien.</a:t>
             </a:r>
           </a:p>
           <a:p>
@@ -4541,7 +4939,7 @@
                 </a:solidFill>
                 <a:latin typeface="Nunito Sans"/>
               </a:rPr>
-              <a:t>Respetar costumbres tiene un límite: la dignidad y los derechos humanos de cada persona.</a:t>
+              <a:t>Es la otra cara de Simmel: distinguirse de unos es parecerse a otros. Y llamar «borregos» a todos es un estereotipo.</a:t>
             </a:r>
           </a:p>
           <a:p>
@@ -4566,111 +4964,25 @@
                 </a:solidFill>
                 <a:latin typeface="Nunito Sans"/>
               </a:rPr>
-              <a:t>Conclusión: que algo sea una tradición no lo hace bueno. Se puede criticar con razones.</a:t>
-            </a:r>
-          </a:p>
-        </p:txBody>
-      </p:sp>
-    </p:spTree>
-  </p:cSld>
-  <p:clrMapOvr>
-    <a:masterClrMapping/>
-  </p:clrMapOvr>
-</p:sld>
-</file>
-
-<file path=ppt/slides/slide13.xml><?xml version="1.0" encoding="utf-8"?>
-<p:sld xmlns:a="http://schemas.openxmlformats.org/drawingml/2006/main" xmlns:p="http://schemas.openxmlformats.org/presentationml/2006/main" xmlns:r="http://schemas.openxmlformats.org/officeDocument/2006/relationships">
-  <p:cSld>
-    <p:bg>
-      <p:bgPr>
-        <a:solidFill>
-          <a:srgbClr val="1F2A44"/>
-        </a:solidFill>
-        <a:effectLst/>
-      </p:bgPr>
-    </p:bg>
-    <p:spTree>
-      <p:nvGrpSpPr>
-        <p:cNvPr id="1" name=""/>
-        <p:cNvGrpSpPr/>
-        <p:nvPr/>
-      </p:nvGrpSpPr>
-      <p:grpSpPr/>
-      <p:sp>
-        <p:nvSpPr>
-          <p:cNvPr id="2" name="TextBox 1"/>
-          <p:cNvSpPr txBox="1"/>
-          <p:nvPr/>
-        </p:nvSpPr>
-        <p:spPr>
-          <a:xfrm>
-            <a:off x="640000" y="2300000"/>
-            <a:ext cx="10912000" cy="500000"/>
-          </a:xfrm>
-          <a:prstGeom prst="rect">
-            <a:avLst/>
-          </a:prstGeom>
-          <a:noFill/>
-        </p:spPr>
-        <p:txBody>
-          <a:bodyPr wrap="square">
-            <a:spAutoFit/>
-          </a:bodyPr>
-          <a:lstStyle/>
-          <a:p>
-            <a:pPr>
-              <a:spcAft>
-                <a:spcPts val="810"/>
-              </a:spcAft>
-            </a:pPr>
-            <a:r>
-              <a:rPr sz="1800" b="1">
-                <a:solidFill>
-                  <a:srgbClr val="F4B183"/>
-                </a:solidFill>
-                <a:latin typeface="Nunito Sans"/>
-              </a:rPr>
-              <a:t>BLOQUE 3</a:t>
-            </a:r>
-          </a:p>
-        </p:txBody>
-      </p:sp>
-      <p:sp>
-        <p:nvSpPr>
-          <p:cNvPr id="3" name="TextBox 2"/>
-          <p:cNvSpPr txBox="1"/>
-          <p:nvPr/>
-        </p:nvSpPr>
-        <p:spPr>
-          <a:xfrm>
-            <a:off x="640000" y="2800000"/>
-            <a:ext cx="10912000" cy="800000"/>
-          </a:xfrm>
-          <a:prstGeom prst="rect">
-            <a:avLst/>
-          </a:prstGeom>
-          <a:noFill/>
-        </p:spPr>
-        <p:txBody>
-          <a:bodyPr wrap="square">
-            <a:spAutoFit/>
-          </a:bodyPr>
-          <a:lstStyle/>
-          <a:p>
-            <a:pPr>
-              <a:spcAft>
-                <a:spcPts val="2160"/>
-              </a:spcAft>
-            </a:pPr>
-            <a:r>
-              <a:rPr sz="4800" b="1">
-                <a:solidFill>
-                  <a:srgbClr val="FBF7EF"/>
-                </a:solidFill>
-                <a:latin typeface="Fredoka"/>
-              </a:rPr>
-              <a:t>Error típico</a:t>
+              <a:t>Conclusión: ir contra una moda también puede ser seguir la moda de </a:t>
+            </a:r>
+            <a:r>
+              <a:rPr sz="2400" b="1">
+                <a:solidFill>
+                  <a:srgbClr val="1F2A44"/>
+                </a:solidFill>
+                <a:latin typeface="Nunito Sans"/>
+              </a:rPr>
+              <a:t>otro</a:t>
+            </a:r>
+            <a:r>
+              <a:rPr sz="2400" b="0">
+                <a:solidFill>
+                  <a:srgbClr val="1F2A44"/>
+                </a:solidFill>
+                <a:latin typeface="Nunito Sans"/>
+              </a:rPr>
+              <a:t> grupo. Nadie está del todo fuera.</a:t>
             </a:r>
           </a:p>
         </p:txBody>
@@ -4735,7 +5047,7 @@
                 </a:solidFill>
                 <a:latin typeface="Nunito Sans"/>
               </a:rPr>
-              <a:t>BLOQUE 3 · ERROR TÍPICO</a:t>
+              <a:t>LO DE HOY EN TRES LÍNEAS</a:t>
             </a:r>
           </a:p>
         </p:txBody>
@@ -4774,64 +5086,21 @@
                 </a:solidFill>
                 <a:latin typeface="Fredoka"/>
               </a:rPr>
-              <a:t>Respetar una cultura</a:t>
-            </a:r>
-          </a:p>
-        </p:txBody>
-      </p:sp>
-      <p:sp>
-        <p:nvSpPr>
-          <p:cNvPr id="4" name="Rectangle 3"/>
-          <p:cNvSpPr/>
-          <p:nvPr/>
-        </p:nvSpPr>
-        <p:spPr>
-          <a:xfrm>
-            <a:off x="640000" y="1650000"/>
-            <a:ext cx="5306000" cy="4400000"/>
-          </a:xfrm>
-          <a:prstGeom prst="rect">
-            <a:avLst/>
-          </a:prstGeom>
-          <a:solidFill>
-            <a:srgbClr val="FBE3D2"/>
-          </a:solidFill>
-          <a:ln>
-            <a:noFill/>
-          </a:ln>
-        </p:spPr>
-        <p:style>
-          <a:lnRef idx="1">
-            <a:schemeClr val="accent1"/>
-          </a:lnRef>
-          <a:fillRef idx="3">
-            <a:schemeClr val="accent1"/>
-          </a:fillRef>
-          <a:effectRef idx="2">
-            <a:schemeClr val="accent1"/>
-          </a:effectRef>
-          <a:fontRef idx="minor">
-            <a:schemeClr val="lt1"/>
-          </a:fontRef>
-        </p:style>
-        <p:txBody>
-          <a:bodyPr rtlCol="0" anchor="ctr"/>
-          <a:lstStyle/>
-          <a:p>
-            <a:pPr algn="ctr"/>
-          </a:p>
-        </p:txBody>
-      </p:sp>
-      <p:sp>
-        <p:nvSpPr>
-          <p:cNvPr id="5" name="TextBox 4"/>
+              <a:t>Escríbelo tú primero, sin mirar</a:t>
+            </a:r>
+          </a:p>
+        </p:txBody>
+      </p:sp>
+      <p:sp>
+        <p:nvSpPr>
+          <p:cNvPr id="4" name="TextBox 3"/>
           <p:cNvSpPr txBox="1"/>
           <p:nvPr/>
         </p:nvSpPr>
         <p:spPr>
           <a:xfrm>
-            <a:off x="840000" y="1750000"/>
-            <a:ext cx="4906000" cy="600000"/>
+            <a:off x="640000" y="1800000"/>
+            <a:ext cx="10912000" cy="1500000"/>
           </a:xfrm>
           <a:prstGeom prst="rect">
             <a:avLst/>
@@ -4846,295 +5115,17 @@
           <a:p>
             <a:pPr>
               <a:spcAft>
-                <a:spcPts val="1260"/>
-              </a:spcAft>
-            </a:pPr>
-            <a:r>
-              <a:rPr sz="2800" b="1">
-                <a:solidFill>
-                  <a:srgbClr val="C2531C"/>
-                </a:solidFill>
-                <a:latin typeface="Nunito Sans"/>
-              </a:rPr>
-              <a:t>No es</a:t>
-            </a:r>
-          </a:p>
-        </p:txBody>
-      </p:sp>
-      <p:sp>
-        <p:nvSpPr>
-          <p:cNvPr id="6" name="TextBox 5"/>
-          <p:cNvSpPr txBox="1"/>
-          <p:nvPr/>
-        </p:nvSpPr>
-        <p:spPr>
-          <a:xfrm>
-            <a:off x="840000" y="2400000"/>
-            <a:ext cx="4906000" cy="3500000"/>
-          </a:xfrm>
-          <a:prstGeom prst="rect">
-            <a:avLst/>
-          </a:prstGeom>
-          <a:noFill/>
-        </p:spPr>
-        <p:txBody>
-          <a:bodyPr wrap="square">
-            <a:spAutoFit/>
-          </a:bodyPr>
-          <a:lstStyle/>
-          <a:p>
-            <a:pPr>
-              <a:spcAft>
                 <a:spcPts val="1170"/>
               </a:spcAft>
             </a:pPr>
             <a:r>
-              <a:rPr sz="2600" b="1">
-                <a:solidFill>
-                  <a:srgbClr val="E8793A"/>
-                </a:solidFill>
-                <a:latin typeface="Nunito Sans"/>
-              </a:rPr>
-              <a:t>• </a:t>
-            </a:r>
-            <a:r>
               <a:rPr sz="2600" b="0">
                 <a:solidFill>
-                  <a:srgbClr val="1F2A44"/>
-                </a:solidFill>
-                <a:latin typeface="Nunito Sans"/>
-              </a:rPr>
-              <a:t>Aceptar cualquier cosa porque «es su cultura»</a:t>
-            </a:r>
-          </a:p>
-          <a:p>
-            <a:pPr>
-              <a:spcAft>
-                <a:spcPts val="1170"/>
-              </a:spcAft>
-            </a:pPr>
-            <a:r>
-              <a:rPr sz="2600" b="1">
-                <a:solidFill>
-                  <a:srgbClr val="E8793A"/>
-                </a:solidFill>
-                <a:latin typeface="Nunito Sans"/>
-              </a:rPr>
-              <a:t>• </a:t>
-            </a:r>
-            <a:r>
-              <a:rPr sz="2600" b="0">
-                <a:solidFill>
-                  <a:srgbClr val="1F2A44"/>
-                </a:solidFill>
-                <a:latin typeface="Nunito Sans"/>
-              </a:rPr>
-              <a:t>Pensar que todos los de un país son iguales</a:t>
-            </a:r>
-          </a:p>
-          <a:p>
-            <a:pPr>
-              <a:spcAft>
-                <a:spcPts val="1170"/>
-              </a:spcAft>
-            </a:pPr>
-            <a:r>
-              <a:rPr sz="2600" b="1">
-                <a:solidFill>
-                  <a:srgbClr val="E8793A"/>
-                </a:solidFill>
-                <a:latin typeface="Nunito Sans"/>
-              </a:rPr>
-              <a:t>• </a:t>
-            </a:r>
-            <a:r>
-              <a:rPr sz="2600" b="0">
-                <a:solidFill>
-                  <a:srgbClr val="1F2A44"/>
-                </a:solidFill>
-                <a:latin typeface="Nunito Sans"/>
-              </a:rPr>
-              <a:t>Llamar «raro» a lo que no conozco</a:t>
-            </a:r>
-          </a:p>
-        </p:txBody>
-      </p:sp>
-      <p:sp>
-        <p:nvSpPr>
-          <p:cNvPr id="7" name="Rectangle 6"/>
-          <p:cNvSpPr/>
-          <p:nvPr/>
-        </p:nvSpPr>
-        <p:spPr>
-          <a:xfrm>
-            <a:off x="6246000" y="1650000"/>
-            <a:ext cx="5306000" cy="4400000"/>
-          </a:xfrm>
-          <a:prstGeom prst="rect">
-            <a:avLst/>
-          </a:prstGeom>
-          <a:solidFill>
-            <a:srgbClr val="EAF0F7"/>
-          </a:solidFill>
-          <a:ln>
-            <a:noFill/>
-          </a:ln>
-        </p:spPr>
-        <p:style>
-          <a:lnRef idx="1">
-            <a:schemeClr val="accent1"/>
-          </a:lnRef>
-          <a:fillRef idx="3">
-            <a:schemeClr val="accent1"/>
-          </a:fillRef>
-          <a:effectRef idx="2">
-            <a:schemeClr val="accent1"/>
-          </a:effectRef>
-          <a:fontRef idx="minor">
-            <a:schemeClr val="lt1"/>
-          </a:fontRef>
-        </p:style>
-        <p:txBody>
-          <a:bodyPr rtlCol="0" anchor="ctr"/>
-          <a:lstStyle/>
-          <a:p>
-            <a:pPr algn="ctr"/>
-          </a:p>
-        </p:txBody>
-      </p:sp>
-      <p:sp>
-        <p:nvSpPr>
-          <p:cNvPr id="8" name="TextBox 7"/>
-          <p:cNvSpPr txBox="1"/>
-          <p:nvPr/>
-        </p:nvSpPr>
-        <p:spPr>
-          <a:xfrm>
-            <a:off x="6446000" y="1750000"/>
-            <a:ext cx="4906000" cy="600000"/>
-          </a:xfrm>
-          <a:prstGeom prst="rect">
-            <a:avLst/>
-          </a:prstGeom>
-          <a:noFill/>
-        </p:spPr>
-        <p:txBody>
-          <a:bodyPr wrap="square">
-            <a:spAutoFit/>
-          </a:bodyPr>
-          <a:lstStyle/>
-          <a:p>
-            <a:pPr>
-              <a:spcAft>
-                <a:spcPts val="1260"/>
-              </a:spcAft>
-            </a:pPr>
-            <a:r>
-              <a:rPr sz="2800" b="1">
-                <a:solidFill>
-                  <a:srgbClr val="2F6FB5"/>
-                </a:solidFill>
-                <a:latin typeface="Nunito Sans"/>
-              </a:rPr>
-              <a:t>Sí es</a:t>
-            </a:r>
-          </a:p>
-        </p:txBody>
-      </p:sp>
-      <p:sp>
-        <p:nvSpPr>
-          <p:cNvPr id="9" name="TextBox 8"/>
-          <p:cNvSpPr txBox="1"/>
-          <p:nvPr/>
-        </p:nvSpPr>
-        <p:spPr>
-          <a:xfrm>
-            <a:off x="6446000" y="2400000"/>
-            <a:ext cx="4906000" cy="3500000"/>
-          </a:xfrm>
-          <a:prstGeom prst="rect">
-            <a:avLst/>
-          </a:prstGeom>
-          <a:noFill/>
-        </p:spPr>
-        <p:txBody>
-          <a:bodyPr wrap="square">
-            <a:spAutoFit/>
-          </a:bodyPr>
-          <a:lstStyle/>
-          <a:p>
-            <a:pPr>
-              <a:spcAft>
-                <a:spcPts val="1170"/>
-              </a:spcAft>
-            </a:pPr>
-            <a:r>
-              <a:rPr sz="2600" b="1">
-                <a:solidFill>
-                  <a:srgbClr val="E8793A"/>
-                </a:solidFill>
-                <a:latin typeface="Nunito Sans"/>
-              </a:rPr>
-              <a:t>• </a:t>
-            </a:r>
-            <a:r>
-              <a:rPr sz="2600" b="0">
-                <a:solidFill>
-                  <a:srgbClr val="1F2A44"/>
-                </a:solidFill>
-                <a:latin typeface="Nunito Sans"/>
-              </a:rPr>
-              <a:t>Intentar entender antes de juzgar</a:t>
-            </a:r>
-          </a:p>
-          <a:p>
-            <a:pPr>
-              <a:spcAft>
-                <a:spcPts val="1170"/>
-              </a:spcAft>
-            </a:pPr>
-            <a:r>
-              <a:rPr sz="2600" b="1">
-                <a:solidFill>
-                  <a:srgbClr val="E8793A"/>
-                </a:solidFill>
-                <a:latin typeface="Nunito Sans"/>
-              </a:rPr>
-              <a:t>• </a:t>
-            </a:r>
-            <a:r>
-              <a:rPr sz="2600" b="0">
-                <a:solidFill>
-                  <a:srgbClr val="1F2A44"/>
-                </a:solidFill>
-                <a:latin typeface="Nunito Sans"/>
-              </a:rPr>
-              <a:t>Ver a cada persona, no solo su origen</a:t>
-            </a:r>
-          </a:p>
-          <a:p>
-            <a:pPr>
-              <a:spcAft>
-                <a:spcPts val="1170"/>
-              </a:spcAft>
-            </a:pPr>
-            <a:r>
-              <a:rPr sz="2600" b="1">
-                <a:solidFill>
-                  <a:srgbClr val="E8793A"/>
-                </a:solidFill>
-                <a:latin typeface="Nunito Sans"/>
-              </a:rPr>
-              <a:t>• </a:t>
-            </a:r>
-            <a:r>
-              <a:rPr sz="2600" b="0">
-                <a:solidFill>
-                  <a:srgbClr val="1F2A44"/>
-                </a:solidFill>
-                <a:latin typeface="Nunito Sans"/>
-              </a:rPr>
-              <a:t>Criticar con razones lo que daña a alguien</a:t>
+                  <a:srgbClr val="4A5568"/>
+                </a:solidFill>
+                <a:latin typeface="Nunito Sans"/>
+              </a:rPr>
+              <a:t>Dos minutos. Después lo comparamos.</a:t>
             </a:r>
           </a:p>
         </p:txBody>
@@ -5212,8 +5203,8 @@
         </p:nvSpPr>
         <p:spPr>
           <a:xfrm>
-            <a:off x="640000" y="760000"/>
-            <a:ext cx="10912000" cy="800000"/>
+            <a:off x="640000" y="1300000"/>
+            <a:ext cx="10912000" cy="4800000"/>
           </a:xfrm>
           <a:prstGeom prst="rect">
             <a:avLst/>
@@ -5228,56 +5219,76 @@
           <a:p>
             <a:pPr>
               <a:spcAft>
-                <a:spcPts val="1710"/>
-              </a:spcAft>
-            </a:pPr>
-            <a:r>
-              <a:rPr sz="3800" b="1">
-                <a:solidFill>
-                  <a:srgbClr val="1F2A44"/>
-                </a:solidFill>
-                <a:latin typeface="Fredoka"/>
-              </a:rPr>
-              <a:t>Escríbelo tú primero, sin mirar</a:t>
-            </a:r>
-          </a:p>
-        </p:txBody>
-      </p:sp>
-      <p:sp>
-        <p:nvSpPr>
-          <p:cNvPr id="4" name="TextBox 3"/>
-          <p:cNvSpPr txBox="1"/>
-          <p:nvPr/>
-        </p:nvSpPr>
-        <p:spPr>
-          <a:xfrm>
-            <a:off x="640000" y="1800000"/>
-            <a:ext cx="10912000" cy="1500000"/>
-          </a:xfrm>
-          <a:prstGeom prst="rect">
-            <a:avLst/>
-          </a:prstGeom>
-          <a:noFill/>
-        </p:spPr>
-        <p:txBody>
-          <a:bodyPr wrap="square">
-            <a:spAutoFit/>
-          </a:bodyPr>
-          <a:lstStyle/>
-          <a:p>
-            <a:pPr>
-              <a:spcAft>
-                <a:spcPts val="1170"/>
-              </a:spcAft>
-            </a:pPr>
-            <a:r>
-              <a:rPr sz="2600" b="0">
-                <a:solidFill>
-                  <a:srgbClr val="4A5568"/>
-                </a:solidFill>
-                <a:latin typeface="Nunito Sans"/>
-              </a:rPr>
-              <a:t>Dos minutos. Después lo comparamos.</a:t>
+                <a:spcPts val="1350"/>
+              </a:spcAft>
+            </a:pPr>
+            <a:r>
+              <a:rPr sz="3000" b="1">
+                <a:solidFill>
+                  <a:srgbClr val="E8793A"/>
+                </a:solidFill>
+                <a:latin typeface="Nunito Sans"/>
+              </a:rPr>
+              <a:t>1. </a:t>
+            </a:r>
+            <a:r>
+              <a:rPr sz="3000" b="0">
+                <a:solidFill>
+                  <a:srgbClr val="1F2A44"/>
+                </a:solidFill>
+                <a:latin typeface="Nunito Sans"/>
+              </a:rPr>
+              <a:t>La moda junta dos ganas: pertenecer a un grupo y distinguirse de otros.</a:t>
+            </a:r>
+          </a:p>
+          <a:p>
+            <a:pPr>
+              <a:spcAft>
+                <a:spcPts val="1350"/>
+              </a:spcAft>
+            </a:pPr>
+            <a:r>
+              <a:rPr sz="3000" b="1">
+                <a:solidFill>
+                  <a:srgbClr val="E8793A"/>
+                </a:solidFill>
+                <a:latin typeface="Nunito Sans"/>
+              </a:rPr>
+              <a:t>2. </a:t>
+            </a:r>
+            <a:r>
+              <a:rPr sz="3000" b="0">
+                <a:solidFill>
+                  <a:srgbClr val="1F2A44"/>
+                </a:solidFill>
+                <a:latin typeface="Nunito Sans"/>
+              </a:rPr>
+              <a:t>Que algo esté de moda dice que gusta, no que sea bueno ni verdad.</a:t>
+            </a:r>
+          </a:p>
+          <a:p>
+            <a:pPr>
+              <a:spcAft>
+                <a:spcPts val="1350"/>
+              </a:spcAft>
+            </a:pPr>
+            <a:r>
+              <a:rPr sz="3000" b="1">
+                <a:solidFill>
+                  <a:srgbClr val="E8793A"/>
+                </a:solidFill>
+                <a:latin typeface="Nunito Sans"/>
+              </a:rPr>
+              <a:t>3. </a:t>
+            </a:r>
+            <a:r>
+              <a:rPr sz="3000" b="0">
+                <a:solidFill>
+                  <a:srgbClr val="1F2A44"/>
+                </a:solidFill>
+                <a:latin typeface="Nunito Sans"/>
+              </a:rPr>
+              <a:t>Muchos roles de la moda son costumbres que cambian; la ropa no es la persona entera.</a:t>
             </a:r>
           </a:p>
         </p:txBody>
@@ -5296,7 +5307,7 @@
     <p:bg>
       <p:bgPr>
         <a:solidFill>
-          <a:srgbClr val="FBF7EF"/>
+          <a:srgbClr val="1F2A44"/>
         </a:solidFill>
         <a:effectLst/>
       </p:bgPr>
@@ -5338,11 +5349,11 @@
             <a:r>
               <a:rPr sz="1400" b="1">
                 <a:solidFill>
-                  <a:srgbClr val="E8793A"/>
-                </a:solidFill>
-                <a:latin typeface="Nunito Sans"/>
-              </a:rPr>
-              <a:t>LO DE HOY EN TRES LÍNEAS</a:t>
+                  <a:srgbClr val="F4B183"/>
+                </a:solidFill>
+                <a:latin typeface="Nunito Sans"/>
+              </a:rPr>
+              <a:t>VÍDEO</a:t>
             </a:r>
           </a:p>
         </p:txBody>
@@ -5355,8 +5366,8 @@
         </p:nvSpPr>
         <p:spPr>
           <a:xfrm>
-            <a:off x="640000" y="1300000"/>
-            <a:ext cx="10912000" cy="4800000"/>
+            <a:off x="640000" y="760000"/>
+            <a:ext cx="10912000" cy="800000"/>
           </a:xfrm>
           <a:prstGeom prst="rect">
             <a:avLst/>
@@ -5371,76 +5382,56 @@
           <a:p>
             <a:pPr>
               <a:spcAft>
-                <a:spcPts val="1350"/>
-              </a:spcAft>
-            </a:pPr>
-            <a:r>
-              <a:rPr sz="3000" b="1">
-                <a:solidFill>
-                  <a:srgbClr val="E8793A"/>
-                </a:solidFill>
-                <a:latin typeface="Nunito Sans"/>
-              </a:rPr>
-              <a:t>1. </a:t>
-            </a:r>
-            <a:r>
-              <a:rPr sz="3000" b="0">
-                <a:solidFill>
-                  <a:srgbClr val="1F2A44"/>
-                </a:solidFill>
-                <a:latin typeface="Nunito Sans"/>
-              </a:rPr>
-              <a:t>Una cultura es la forma de vivir que un grupo aprende, comparte y pasa a otros.</a:t>
-            </a:r>
-          </a:p>
-          <a:p>
-            <a:pPr>
-              <a:spcAft>
-                <a:spcPts val="1350"/>
-              </a:spcAft>
-            </a:pPr>
-            <a:r>
-              <a:rPr sz="3000" b="1">
-                <a:solidFill>
-                  <a:srgbClr val="E8793A"/>
-                </a:solidFill>
-                <a:latin typeface="Nunito Sans"/>
-              </a:rPr>
-              <a:t>2. </a:t>
-            </a:r>
-            <a:r>
-              <a:rPr sz="3000" b="0">
-                <a:solidFill>
-                  <a:srgbClr val="1F2A44"/>
-                </a:solidFill>
-                <a:latin typeface="Nunito Sans"/>
-              </a:rPr>
-              <a:t>El etnocentrismo mide las demás culturas con la propia y llama raro a lo distinto.</a:t>
-            </a:r>
-          </a:p>
-          <a:p>
-            <a:pPr>
-              <a:spcAft>
-                <a:spcPts val="1350"/>
-              </a:spcAft>
-            </a:pPr>
-            <a:r>
-              <a:rPr sz="3000" b="1">
-                <a:solidFill>
-                  <a:srgbClr val="E8793A"/>
-                </a:solidFill>
-                <a:latin typeface="Nunito Sans"/>
-              </a:rPr>
-              <a:t>3. </a:t>
-            </a:r>
-            <a:r>
-              <a:rPr sz="3000" b="0">
-                <a:solidFill>
-                  <a:srgbClr val="1F2A44"/>
-                </a:solidFill>
-                <a:latin typeface="Nunito Sans"/>
-              </a:rPr>
-              <a:t>Respetar costumbres tiene un límite: los derechos humanos de cada persona.</a:t>
+                <a:spcPts val="1620"/>
+              </a:spcAft>
+            </a:pPr>
+            <a:r>
+              <a:rPr sz="3600" b="1">
+                <a:solidFill>
+                  <a:srgbClr val="FBF7EF"/>
+                </a:solidFill>
+                <a:latin typeface="Fredoka"/>
+              </a:rPr>
+              <a:t>Por qué seguimos las modas: imitar al grupo y distinguirse de otros</a:t>
+            </a:r>
+          </a:p>
+        </p:txBody>
+      </p:sp>
+      <p:sp>
+        <p:nvSpPr>
+          <p:cNvPr id="4" name="TextBox 3"/>
+          <p:cNvSpPr txBox="1"/>
+          <p:nvPr/>
+        </p:nvSpPr>
+        <p:spPr>
+          <a:xfrm>
+            <a:off x="640000" y="2200000"/>
+            <a:ext cx="10912000" cy="2000000"/>
+          </a:xfrm>
+          <a:prstGeom prst="rect">
+            <a:avLst/>
+          </a:prstGeom>
+          <a:noFill/>
+        </p:spPr>
+        <p:txBody>
+          <a:bodyPr wrap="square">
+            <a:spAutoFit/>
+          </a:bodyPr>
+          <a:lstStyle/>
+          <a:p>
+            <a:pPr>
+              <a:spcAft>
+                <a:spcPts val="1080"/>
+              </a:spcAft>
+            </a:pPr>
+            <a:r>
+              <a:rPr sz="2400" b="0">
+                <a:solidFill>
+                  <a:srgbClr val="C9D3E6"/>
+                </a:solidFill>
+                <a:latin typeface="Nunito Sans"/>
+              </a:rPr>
+              <a:t>Ver con más ejemplos cómo la moda junta las ganas de pertenecer y de distinguirse.</a:t>
             </a:r>
           </a:p>
         </p:txBody>
@@ -5505,149 +5496,6 @@
                 </a:solidFill>
                 <a:latin typeface="Nunito Sans"/>
               </a:rPr>
-              <a:t>VÍDEO</a:t>
-            </a:r>
-          </a:p>
-        </p:txBody>
-      </p:sp>
-      <p:sp>
-        <p:nvSpPr>
-          <p:cNvPr id="3" name="TextBox 2"/>
-          <p:cNvSpPr txBox="1"/>
-          <p:nvPr/>
-        </p:nvSpPr>
-        <p:spPr>
-          <a:xfrm>
-            <a:off x="640000" y="760000"/>
-            <a:ext cx="10912000" cy="800000"/>
-          </a:xfrm>
-          <a:prstGeom prst="rect">
-            <a:avLst/>
-          </a:prstGeom>
-          <a:noFill/>
-        </p:spPr>
-        <p:txBody>
-          <a:bodyPr wrap="square">
-            <a:spAutoFit/>
-          </a:bodyPr>
-          <a:lstStyle/>
-          <a:p>
-            <a:pPr>
-              <a:spcAft>
-                <a:spcPts val="1620"/>
-              </a:spcAft>
-            </a:pPr>
-            <a:r>
-              <a:rPr sz="3600" b="1">
-                <a:solidFill>
-                  <a:srgbClr val="FBF7EF"/>
-                </a:solidFill>
-                <a:latin typeface="Fredoka"/>
-              </a:rPr>
-              <a:t>Qué es la cultura y las posturas ante la diversidad cultural: etnocentrismo y relativismo</a:t>
-            </a:r>
-          </a:p>
-        </p:txBody>
-      </p:sp>
-      <p:sp>
-        <p:nvSpPr>
-          <p:cNvPr id="4" name="TextBox 3"/>
-          <p:cNvSpPr txBox="1"/>
-          <p:nvPr/>
-        </p:nvSpPr>
-        <p:spPr>
-          <a:xfrm>
-            <a:off x="640000" y="2200000"/>
-            <a:ext cx="10912000" cy="2000000"/>
-          </a:xfrm>
-          <a:prstGeom prst="rect">
-            <a:avLst/>
-          </a:prstGeom>
-          <a:noFill/>
-        </p:spPr>
-        <p:txBody>
-          <a:bodyPr wrap="square">
-            <a:spAutoFit/>
-          </a:bodyPr>
-          <a:lstStyle/>
-          <a:p>
-            <a:pPr>
-              <a:spcAft>
-                <a:spcPts val="1080"/>
-              </a:spcAft>
-            </a:pPr>
-            <a:r>
-              <a:rPr sz="2400" b="0">
-                <a:solidFill>
-                  <a:srgbClr val="C9D3E6"/>
-                </a:solidFill>
-                <a:latin typeface="Nunito Sans"/>
-              </a:rPr>
-              <a:t>Que vean otros ejemplos de etnocentrismo y del límite del relativismo, distintos a los de clase.</a:t>
-            </a:r>
-          </a:p>
-        </p:txBody>
-      </p:sp>
-    </p:spTree>
-  </p:cSld>
-  <p:clrMapOvr>
-    <a:masterClrMapping/>
-  </p:clrMapOvr>
-</p:sld>
-</file>
-
-<file path=ppt/slides/slide18.xml><?xml version="1.0" encoding="utf-8"?>
-<p:sld xmlns:a="http://schemas.openxmlformats.org/drawingml/2006/main" xmlns:p="http://schemas.openxmlformats.org/presentationml/2006/main" xmlns:r="http://schemas.openxmlformats.org/officeDocument/2006/relationships">
-  <p:cSld>
-    <p:bg>
-      <p:bgPr>
-        <a:solidFill>
-          <a:srgbClr val="1F2A44"/>
-        </a:solidFill>
-        <a:effectLst/>
-      </p:bgPr>
-    </p:bg>
-    <p:spTree>
-      <p:nvGrpSpPr>
-        <p:cNvPr id="1" name=""/>
-        <p:cNvGrpSpPr/>
-        <p:nvPr/>
-      </p:nvGrpSpPr>
-      <p:grpSpPr/>
-      <p:sp>
-        <p:nvSpPr>
-          <p:cNvPr id="2" name="TextBox 1"/>
-          <p:cNvSpPr txBox="1"/>
-          <p:nvPr/>
-        </p:nvSpPr>
-        <p:spPr>
-          <a:xfrm>
-            <a:off x="640000" y="380000"/>
-            <a:ext cx="10912000" cy="420000"/>
-          </a:xfrm>
-          <a:prstGeom prst="rect">
-            <a:avLst/>
-          </a:prstGeom>
-          <a:noFill/>
-        </p:spPr>
-        <p:txBody>
-          <a:bodyPr wrap="square">
-            <a:spAutoFit/>
-          </a:bodyPr>
-          <a:lstStyle/>
-          <a:p>
-            <a:pPr>
-              <a:spcAft>
-                <a:spcPts val="630"/>
-              </a:spcAft>
-            </a:pPr>
-            <a:r>
-              <a:rPr sz="1400" b="1">
-                <a:solidFill>
-                  <a:srgbClr val="F4B183"/>
-                </a:solidFill>
-                <a:latin typeface="Nunito Sans"/>
-              </a:rPr>
               <a:t>AHORA, LA HOJA DEL DÍA</a:t>
             </a:r>
           </a:p>
@@ -6241,7 +6089,7 @@
                 </a:solidFill>
                 <a:latin typeface="Nunito Sans"/>
               </a:rPr>
-              <a:t>La orientación ______ es hacia quién siente una persona atracción y amor.  (sesión 83)</a:t>
+              <a:t>Un ______ es juzgar a una persona antes de conocerla, solo por su grupo.  (sesión 83)</a:t>
             </a:r>
           </a:p>
           <a:p>
@@ -6266,7 +6114,7 @@
                 </a:solidFill>
                 <a:latin typeface="Nunito Sans"/>
               </a:rPr>
-              <a:t>El consentimiento en las relaciones se resume así: solo ______ es sí.  (sesión 83)</a:t>
+              <a:t>La palabra «aporofobia» la creó la filósofa Adela ______.  (sesión 83)</a:t>
             </a:r>
           </a:p>
           <a:p>
@@ -6291,7 +6139,7 @@
                 </a:solidFill>
                 <a:latin typeface="Nunito Sans"/>
               </a:rPr>
-              <a:t>Un ______ del amor romántico es una creencia sobre el amor que se da por verdadera, pero es falsa o exagerada.  (sesión 79)</a:t>
+              <a:t>Una ______ es ser distintos en algo; una desigualdad es tener menos derechos u oportunidades por ser de un grupo.  (sesión 79)</a:t>
             </a:r>
           </a:p>
         </p:txBody>
@@ -6443,7 +6291,7 @@
                 </a:solidFill>
                 <a:latin typeface="Nunito Sans"/>
               </a:rPr>
-              <a:t>La orientación </a:t>
+              <a:t>Un </a:t>
             </a:r>
             <a:r>
               <a:rPr sz="2600" b="1">
@@ -6452,7 +6300,7 @@
                 </a:solidFill>
                 <a:latin typeface="Nunito Sans"/>
               </a:rPr>
-              <a:t>sexual</a:t>
+              <a:t>prejuicio</a:t>
             </a:r>
             <a:r>
               <a:rPr sz="2600" b="0">
@@ -6461,7 +6309,7 @@
                 </a:solidFill>
                 <a:latin typeface="Nunito Sans"/>
               </a:rPr>
-              <a:t> es hacia quién siente una persona atracción y amor.  (sesión 83)</a:t>
+              <a:t> es juzgar a una persona antes de conocerla, solo por su grupo.  (sesión 83)</a:t>
             </a:r>
           </a:p>
           <a:p>
@@ -6486,7 +6334,7 @@
                 </a:solidFill>
                 <a:latin typeface="Nunito Sans"/>
               </a:rPr>
-              <a:t>El consentimiento en las relaciones se resume así: solo </a:t>
+              <a:t>La palabra «aporofobia» la creó la filósofa Adela </a:t>
             </a:r>
             <a:r>
               <a:rPr sz="2600" b="1">
@@ -6495,7 +6343,7 @@
                 </a:solidFill>
                 <a:latin typeface="Nunito Sans"/>
               </a:rPr>
-              <a:t>sí</a:t>
+              <a:t>Cortina</a:t>
             </a:r>
             <a:r>
               <a:rPr sz="2600" b="0">
@@ -6504,7 +6352,7 @@
                 </a:solidFill>
                 <a:latin typeface="Nunito Sans"/>
               </a:rPr>
-              <a:t> es sí.  (sesión 83)</a:t>
+              <a:t>.  (sesión 83)</a:t>
             </a:r>
           </a:p>
           <a:p>
@@ -6529,7 +6377,7 @@
                 </a:solidFill>
                 <a:latin typeface="Nunito Sans"/>
               </a:rPr>
-              <a:t>Un </a:t>
+              <a:t>Una </a:t>
             </a:r>
             <a:r>
               <a:rPr sz="2600" b="1">
@@ -6538,7 +6386,7 @@
                 </a:solidFill>
                 <a:latin typeface="Nunito Sans"/>
               </a:rPr>
-              <a:t>mito</a:t>
+              <a:t>diferencia</a:t>
             </a:r>
             <a:r>
               <a:rPr sz="2600" b="0">
@@ -6547,7 +6395,7 @@
                 </a:solidFill>
                 <a:latin typeface="Nunito Sans"/>
               </a:rPr>
-              <a:t> del amor romántico es una creencia sobre el amor que se da por verdadera, pero es falsa o exagerada.  (sesión 79)</a:t>
+              <a:t> es ser distintos en algo; una desigualdad es tener menos derechos u oportunidades por ser de un grupo.  (sesión 79)</a:t>
             </a:r>
           </a:p>
         </p:txBody>
@@ -6694,7 +6542,7 @@
                 </a:solidFill>
                 <a:latin typeface="Nunito Sans"/>
               </a:rPr>
-              <a:t>En casa de un chico todos se quitan los zapatos al entrar. En casa de otro, nadie. La primera vez, el segundo se quedó parado en la puerta del primero.</a:t>
+              <a:t>Piensa en algo que hace dos años llevaba o hacía todo el mundo y que hoy ya «no se lleva».</a:t>
             </a:r>
           </a:p>
         </p:txBody>
@@ -6733,7 +6581,7 @@
                 </a:solidFill>
                 <a:latin typeface="Nunito Sans"/>
               </a:rPr>
-              <a:t>¿Cuál de las dos casas lo hace bien?</a:t>
+              <a:t>¿Por qué gustaba entonces? ¿Qué ha cambiado: la cosa o el grupo?</a:t>
             </a:r>
           </a:p>
         </p:txBody>
@@ -6837,7 +6685,7 @@
                 </a:solidFill>
                 <a:latin typeface="Fredoka"/>
               </a:rPr>
-              <a:t>Qué es una cultura</a:t>
+              <a:t>Moda e identidad</a:t>
             </a:r>
           </a:p>
         </p:txBody>
@@ -6902,7 +6750,7 @@
                 </a:solidFill>
                 <a:latin typeface="Nunito Sans"/>
               </a:rPr>
-              <a:t>BLOQUE 1 · QUÉ ES UNA CULTURA</a:t>
+              <a:t>BLOQUE 1 · MODA E IDENTIDAD</a:t>
             </a:r>
           </a:p>
         </p:txBody>
@@ -6941,7 +6789,7 @@
                 </a:solidFill>
                 <a:latin typeface="Fredoka"/>
               </a:rPr>
-              <a:t>Cultura</a:t>
+              <a:t>Moda</a:t>
             </a:r>
           </a:p>
         </p:txBody>
@@ -7023,7 +6871,7 @@
                 </a:solidFill>
                 <a:latin typeface="Nunito Sans"/>
               </a:rPr>
-              <a:t>Es la forma de vivir que un grupo aprende, comparte y pasa a los que vienen después.</a:t>
+              <a:t>Es una forma de vestir, hablar o hacer que se extiende en un grupo durante un tiempo y luego cambia.</a:t>
             </a:r>
           </a:p>
         </p:txBody>
@@ -7071,16 +6919,23 @@
                 </a:solidFill>
                 <a:latin typeface="Nunito Sans"/>
               </a:rPr>
-              <a:t>Se </a:t>
-            </a:r>
+              <a:t>No solo ropa: música, bailes, palabras, apps, cortes de pelo</a:t>
+            </a:r>
+          </a:p>
+          <a:p>
+            <a:pPr>
+              <a:spcAft>
+                <a:spcPts val="1260"/>
+              </a:spcAft>
+            </a:pPr>
             <a:r>
               <a:rPr sz="2800" b="1">
                 <a:solidFill>
-                  <a:srgbClr val="1F2A44"/>
-                </a:solidFill>
-                <a:latin typeface="Nunito Sans"/>
-              </a:rPr>
-              <a:t>aprende</a:t>
+                  <a:srgbClr val="E8793A"/>
+                </a:solidFill>
+                <a:latin typeface="Nunito Sans"/>
+              </a:rPr>
+              <a:t>• </a:t>
             </a:r>
             <a:r>
               <a:rPr sz="2800" b="0">
@@ -7089,7 +6944,7 @@
                 </a:solidFill>
                 <a:latin typeface="Nunito Sans"/>
               </a:rPr>
-              <a:t>: no viene en los genes</a:t>
+              <a:t>Dura un tiempo: lo que hoy se lleva, mañana «ya no»</a:t>
             </a:r>
           </a:p>
           <a:p>
@@ -7114,7 +6969,25 @@
                 </a:solidFill>
                 <a:latin typeface="Nunito Sans"/>
               </a:rPr>
-              <a:t>Todos los grupos humanos tienen cultura</a:t>
+              <a:t>Dice algo de ti: es una </a:t>
+            </a:r>
+            <a:r>
+              <a:rPr sz="2800" b="1">
+                <a:solidFill>
+                  <a:srgbClr val="1F2A44"/>
+                </a:solidFill>
+                <a:latin typeface="Nunito Sans"/>
+              </a:rPr>
+              <a:t>señal</a:t>
+            </a:r>
+            <a:r>
+              <a:rPr sz="2800" b="0">
+                <a:solidFill>
+                  <a:srgbClr val="1F2A44"/>
+                </a:solidFill>
+                <a:latin typeface="Nunito Sans"/>
+              </a:rPr>
+              <a:t> de identidad</a:t>
             </a:r>
           </a:p>
           <a:p>
@@ -7133,74 +7006,22 @@
               <a:t>• </a:t>
             </a:r>
             <a:r>
+              <a:rPr sz="2800" b="1">
+                <a:solidFill>
+                  <a:srgbClr val="1F2A44"/>
+                </a:solidFill>
+                <a:latin typeface="Nunito Sans"/>
+              </a:rPr>
+              <a:t>Identidad:</a:t>
+            </a:r>
+            <a:r>
               <a:rPr sz="2800" b="0">
                 <a:solidFill>
                   <a:srgbClr val="1F2A44"/>
                 </a:solidFill>
                 <a:latin typeface="Nunito Sans"/>
               </a:rPr>
-              <a:t>Hay muchas </a:t>
-            </a:r>
-            <a:r>
-              <a:rPr sz="2800" b="1">
-                <a:solidFill>
-                  <a:srgbClr val="1F2A44"/>
-                </a:solidFill>
-                <a:latin typeface="Nunito Sans"/>
-              </a:rPr>
-              <a:t>culturas</a:t>
-            </a:r>
-            <a:r>
-              <a:rPr sz="2800" b="0">
-                <a:solidFill>
-                  <a:srgbClr val="1F2A44"/>
-                </a:solidFill>
-                <a:latin typeface="Nunito Sans"/>
-              </a:rPr>
-              <a:t>, y cambian con el tiempo</a:t>
-            </a:r>
-          </a:p>
-          <a:p>
-            <a:pPr>
-              <a:spcAft>
-                <a:spcPts val="1260"/>
-              </a:spcAft>
-            </a:pPr>
-            <a:r>
-              <a:rPr sz="2800" b="1">
-                <a:solidFill>
-                  <a:srgbClr val="E8793A"/>
-                </a:solidFill>
-                <a:latin typeface="Nunito Sans"/>
-              </a:rPr>
-              <a:t>• </a:t>
-            </a:r>
-            <a:r>
-              <a:rPr sz="2800" b="0">
-                <a:solidFill>
-                  <a:srgbClr val="1F2A44"/>
-                </a:solidFill>
-                <a:latin typeface="Nunito Sans"/>
-              </a:rPr>
-              <a:t>Una persona puede vivir en </a:t>
-            </a:r>
-            <a:r>
-              <a:rPr sz="2800" b="1">
-                <a:solidFill>
-                  <a:srgbClr val="1F2A44"/>
-                </a:solidFill>
-                <a:latin typeface="Nunito Sans"/>
-              </a:rPr>
-              <a:t>varias</a:t>
-            </a:r>
-            <a:r>
-              <a:rPr sz="2800" b="0">
-                <a:solidFill>
-                  <a:srgbClr val="1F2A44"/>
-                </a:solidFill>
-                <a:latin typeface="Nunito Sans"/>
-              </a:rPr>
-              <a:t> a la vez</a:t>
+              <a:t> quién eres y de qué grupos te sientes parte</a:t>
             </a:r>
           </a:p>
         </p:txBody>
@@ -7265,7 +7086,7 @@
                 </a:solidFill>
                 <a:latin typeface="Nunito Sans"/>
               </a:rPr>
-              <a:t>BLOQUE 1 · QUÉ ES UNA CULTURA</a:t>
+              <a:t>BLOQUE 1 · MODA E IDENTIDAD</a:t>
             </a:r>
           </a:p>
         </p:txBody>
@@ -7304,303 +7125,209 @@
                 </a:solidFill>
                 <a:latin typeface="Fredoka"/>
               </a:rPr>
-              <a:t>Elementos de una cultura</a:t>
-            </a:r>
-          </a:p>
-        </p:txBody>
-      </p:sp>
-      <p:graphicFrame>
-        <p:nvGraphicFramePr>
-          <p:cNvPr id="4" name="Table 3"/>
-          <p:cNvGraphicFramePr>
-            <a:graphicFrameLocks noGrp="1"/>
-          </p:cNvGraphicFramePr>
+              <a:t>Pertenecer y distinguirse</a:t>
+            </a:r>
+          </a:p>
+        </p:txBody>
+      </p:sp>
+      <p:sp>
+        <p:nvSpPr>
+          <p:cNvPr id="4" name="Rectangle 3"/>
+          <p:cNvSpPr/>
           <p:nvPr/>
-        </p:nvGraphicFramePr>
-        <p:xfrm>
-          <a:off x="640000" y="1700000"/>
-          <a:ext cx="10912000" cy="3000000"/>
-        </p:xfrm>
-        <a:graphic>
-          <a:graphicData uri="http://schemas.openxmlformats.org/drawingml/2006/table">
-            <a:tbl>
-              <a:tblPr firstRow="1" bandRow="1">
-                <a:tableStyleId>{5C22544A-7EE6-4342-B048-85BDC9FD1C3A}</a:tableStyleId>
-              </a:tblPr>
-              <a:tblGrid>
-                <a:gridCol w="5456000"/>
-                <a:gridCol w="5456000"/>
-              </a:tblGrid>
-              <a:tr h="600000">
-                <a:tc>
-                  <a:txBody>
-                    <a:bodyPr/>
-                    <a:lstStyle/>
-                    <a:p>
-                      <a:r>
-                        <a:rPr sz="2000" b="1">
-                          <a:solidFill>
-                            <a:srgbClr val="FBF7EF"/>
-                          </a:solidFill>
-                          <a:latin typeface="Fredoka"/>
-                        </a:rPr>
-                        <a:t>Elemento</a:t>
-                      </a:r>
-                    </a:p>
-                  </a:txBody>
-                  <a:tcPr>
-                    <a:solidFill>
-                      <a:srgbClr val="1F2A44"/>
-                    </a:solidFill>
-                  </a:tcPr>
-                </a:tc>
-                <a:tc>
-                  <a:txBody>
-                    <a:bodyPr/>
-                    <a:lstStyle/>
-                    <a:p>
-                      <a:r>
-                        <a:rPr sz="2000" b="1">
-                          <a:solidFill>
-                            <a:srgbClr val="FBF7EF"/>
-                          </a:solidFill>
-                          <a:latin typeface="Fredoka"/>
-                        </a:rPr>
-                        <a:t>Ejemplo cerca de ti</a:t>
-                      </a:r>
-                    </a:p>
-                  </a:txBody>
-                  <a:tcPr>
-                    <a:solidFill>
-                      <a:srgbClr val="1F2A44"/>
-                    </a:solidFill>
-                  </a:tcPr>
-                </a:tc>
-              </a:tr>
-              <a:tr h="600000">
-                <a:tc>
-                  <a:txBody>
-                    <a:bodyPr/>
-                    <a:lstStyle/>
-                    <a:p>
-                      <a:r>
-                        <a:rPr sz="2000" b="1">
-                          <a:solidFill>
-                            <a:srgbClr val="1F2A44"/>
-                          </a:solidFill>
-                          <a:latin typeface="Nunito Sans"/>
-                        </a:rPr>
-                        <a:t>Costumbres</a:t>
-                      </a:r>
-                      <a:r>
-                        <a:rPr sz="2000" b="0">
-                          <a:solidFill>
-                            <a:srgbClr val="1F2A44"/>
-                          </a:solidFill>
-                          <a:latin typeface="Nunito Sans"/>
-                        </a:rPr>
-                        <a:t> y hábitos</a:t>
-                      </a:r>
-                    </a:p>
-                  </a:txBody>
-                  <a:tcPr>
-                    <a:solidFill>
-                      <a:srgbClr val="FFFFFF"/>
-                    </a:solidFill>
-                  </a:tcPr>
-                </a:tc>
-                <a:tc>
-                  <a:txBody>
-                    <a:bodyPr/>
-                    <a:lstStyle/>
-                    <a:p>
-                      <a:r>
-                        <a:rPr sz="2000" b="0">
-                          <a:solidFill>
-                            <a:srgbClr val="1F2A44"/>
-                          </a:solidFill>
-                          <a:latin typeface="Nunito Sans"/>
-                        </a:rPr>
-                        <a:t>Horarios de comida, fiestas como Aste Nagusia</a:t>
-                      </a:r>
-                    </a:p>
-                  </a:txBody>
-                  <a:tcPr>
-                    <a:solidFill>
-                      <a:srgbClr val="FFFFFF"/>
-                    </a:solidFill>
-                  </a:tcPr>
-                </a:tc>
-              </a:tr>
-              <a:tr h="600000">
-                <a:tc>
-                  <a:txBody>
-                    <a:bodyPr/>
-                    <a:lstStyle/>
-                    <a:p>
-                      <a:r>
-                        <a:rPr sz="2000" b="1">
-                          <a:solidFill>
-                            <a:srgbClr val="1F2A44"/>
-                          </a:solidFill>
-                          <a:latin typeface="Nunito Sans"/>
-                        </a:rPr>
-                        <a:t>Creencias</a:t>
-                      </a:r>
-                      <a:r>
-                        <a:rPr sz="2000" b="0">
-                          <a:solidFill>
-                            <a:srgbClr val="1F2A44"/>
-                          </a:solidFill>
-                          <a:latin typeface="Nunito Sans"/>
-                        </a:rPr>
-                        <a:t> y valores</a:t>
-                      </a:r>
-                    </a:p>
-                  </a:txBody>
-                  <a:tcPr>
-                    <a:solidFill>
-                      <a:srgbClr val="EAF0F7"/>
-                    </a:solidFill>
-                  </a:tcPr>
-                </a:tc>
-                <a:tc>
-                  <a:txBody>
-                    <a:bodyPr/>
-                    <a:lstStyle/>
-                    <a:p>
-                      <a:r>
-                        <a:rPr sz="2000" b="0">
-                          <a:solidFill>
-                            <a:srgbClr val="1F2A44"/>
-                          </a:solidFill>
-                          <a:latin typeface="Nunito Sans"/>
-                        </a:rPr>
-                        <a:t>Lo que se considera importante, religiones</a:t>
-                      </a:r>
-                    </a:p>
-                  </a:txBody>
-                  <a:tcPr>
-                    <a:solidFill>
-                      <a:srgbClr val="EAF0F7"/>
-                    </a:solidFill>
-                  </a:tcPr>
-                </a:tc>
-              </a:tr>
-              <a:tr h="600000">
-                <a:tc>
-                  <a:txBody>
-                    <a:bodyPr/>
-                    <a:lstStyle/>
-                    <a:p>
-                      <a:r>
-                        <a:rPr sz="2000" b="1">
-                          <a:solidFill>
-                            <a:srgbClr val="1F2A44"/>
-                          </a:solidFill>
-                          <a:latin typeface="Nunito Sans"/>
-                        </a:rPr>
-                        <a:t>Lengua</a:t>
-                      </a:r>
-                      <a:r>
-                        <a:rPr sz="2000" b="0">
-                          <a:solidFill>
-                            <a:srgbClr val="1F2A44"/>
-                          </a:solidFill>
-                          <a:latin typeface="Nunito Sans"/>
-                        </a:rPr>
-                        <a:t> y arte</a:t>
-                      </a:r>
-                    </a:p>
-                  </a:txBody>
-                  <a:tcPr>
-                    <a:solidFill>
-                      <a:srgbClr val="FFFFFF"/>
-                    </a:solidFill>
-                  </a:tcPr>
-                </a:tc>
-                <a:tc>
-                  <a:txBody>
-                    <a:bodyPr/>
-                    <a:lstStyle/>
-                    <a:p>
-                      <a:r>
-                        <a:rPr sz="2000" b="0">
-                          <a:solidFill>
-                            <a:srgbClr val="1F2A44"/>
-                          </a:solidFill>
-                          <a:latin typeface="Nunito Sans"/>
-                        </a:rPr>
-                        <a:t>Euskera, castellano, bertsos, canciones</a:t>
-                      </a:r>
-                    </a:p>
-                  </a:txBody>
-                  <a:tcPr>
-                    <a:solidFill>
-                      <a:srgbClr val="FFFFFF"/>
-                    </a:solidFill>
-                  </a:tcPr>
-                </a:tc>
-              </a:tr>
-              <a:tr h="600000">
-                <a:tc>
-                  <a:txBody>
-                    <a:bodyPr/>
-                    <a:lstStyle/>
-                    <a:p>
-                      <a:r>
-                        <a:rPr sz="2000" b="1">
-                          <a:solidFill>
-                            <a:srgbClr val="1F2A44"/>
-                          </a:solidFill>
-                          <a:latin typeface="Nunito Sans"/>
-                        </a:rPr>
-                        <a:t>Objetos</a:t>
-                      </a:r>
-                      <a:r>
-                        <a:rPr sz="2000" b="0">
-                          <a:solidFill>
-                            <a:srgbClr val="1F2A44"/>
-                          </a:solidFill>
-                          <a:latin typeface="Nunito Sans"/>
-                        </a:rPr>
-                        <a:t> y formas de relacionarse</a:t>
-                      </a:r>
-                    </a:p>
-                  </a:txBody>
-                  <a:tcPr>
-                    <a:solidFill>
-                      <a:srgbClr val="EAF0F7"/>
-                    </a:solidFill>
-                  </a:tcPr>
-                </a:tc>
-                <a:tc>
-                  <a:txBody>
-                    <a:bodyPr/>
-                    <a:lstStyle/>
-                    <a:p>
-                      <a:r>
-                        <a:rPr sz="2000" b="0">
-                          <a:solidFill>
-                            <a:srgbClr val="1F2A44"/>
-                          </a:solidFill>
-                          <a:latin typeface="Nunito Sans"/>
-                        </a:rPr>
-                        <a:t>La txapela; dar uno o dos besos al saludar</a:t>
-                      </a:r>
-                    </a:p>
-                  </a:txBody>
-                  <a:tcPr>
-                    <a:solidFill>
-                      <a:srgbClr val="EAF0F7"/>
-                    </a:solidFill>
-                  </a:tcPr>
-                </a:tc>
-              </a:tr>
-            </a:tbl>
-          </a:graphicData>
-        </a:graphic>
-      </p:graphicFrame>
+        </p:nvSpPr>
+        <p:spPr>
+          <a:xfrm>
+            <a:off x="640000" y="1650000"/>
+            <a:ext cx="10912000" cy="1150000"/>
+          </a:xfrm>
+          <a:prstGeom prst="rect">
+            <a:avLst/>
+          </a:prstGeom>
+          <a:solidFill>
+            <a:srgbClr val="EAF0F7"/>
+          </a:solidFill>
+          <a:ln>
+            <a:noFill/>
+          </a:ln>
+        </p:spPr>
+        <p:style>
+          <a:lnRef idx="1">
+            <a:schemeClr val="accent1"/>
+          </a:lnRef>
+          <a:fillRef idx="3">
+            <a:schemeClr val="accent1"/>
+          </a:fillRef>
+          <a:effectRef idx="2">
+            <a:schemeClr val="accent1"/>
+          </a:effectRef>
+          <a:fontRef idx="minor">
+            <a:schemeClr val="lt1"/>
+          </a:fontRef>
+        </p:style>
+        <p:txBody>
+          <a:bodyPr rtlCol="0" anchor="ctr"/>
+          <a:lstStyle/>
+          <a:p>
+            <a:pPr algn="ctr"/>
+          </a:p>
+        </p:txBody>
+      </p:sp>
+      <p:sp>
+        <p:nvSpPr>
+          <p:cNvPr id="5" name="TextBox 4"/>
+          <p:cNvSpPr txBox="1"/>
+          <p:nvPr/>
+        </p:nvSpPr>
+        <p:spPr>
+          <a:xfrm>
+            <a:off x="840000" y="1730000"/>
+            <a:ext cx="10512000" cy="1000000"/>
+          </a:xfrm>
+          <a:prstGeom prst="rect">
+            <a:avLst/>
+          </a:prstGeom>
+          <a:noFill/>
+        </p:spPr>
+        <p:txBody>
+          <a:bodyPr wrap="square" anchor="ctr">
+            <a:spAutoFit/>
+          </a:bodyPr>
+          <a:lstStyle/>
+          <a:p>
+            <a:pPr>
+              <a:spcAft>
+                <a:spcPts val="1260"/>
+              </a:spcAft>
+            </a:pPr>
+            <a:r>
+              <a:rPr sz="2800" b="1">
+                <a:solidFill>
+                  <a:srgbClr val="1F2A44"/>
+                </a:solidFill>
+                <a:latin typeface="Nunito Sans"/>
+              </a:rPr>
+              <a:t>El sociólogo Georg Simmel (1905) vio que la moda junta dos ganas opuestas: parecerse a los demás y distinguirse.</a:t>
+            </a:r>
+          </a:p>
+        </p:txBody>
+      </p:sp>
+      <p:sp>
+        <p:nvSpPr>
+          <p:cNvPr id="6" name="TextBox 5"/>
+          <p:cNvSpPr txBox="1"/>
+          <p:nvPr/>
+        </p:nvSpPr>
+        <p:spPr>
+          <a:xfrm>
+            <a:off x="640000" y="3000000"/>
+            <a:ext cx="10912000" cy="3458000"/>
+          </a:xfrm>
+          <a:prstGeom prst="rect">
+            <a:avLst/>
+          </a:prstGeom>
+          <a:noFill/>
+        </p:spPr>
+        <p:txBody>
+          <a:bodyPr wrap="square">
+            <a:spAutoFit/>
+          </a:bodyPr>
+          <a:lstStyle/>
+          <a:p>
+            <a:pPr>
+              <a:spcAft>
+                <a:spcPts val="1260"/>
+              </a:spcAft>
+            </a:pPr>
+            <a:r>
+              <a:rPr sz="2800" b="1">
+                <a:solidFill>
+                  <a:srgbClr val="E8793A"/>
+                </a:solidFill>
+                <a:latin typeface="Nunito Sans"/>
+              </a:rPr>
+              <a:t>• </a:t>
+            </a:r>
+            <a:r>
+              <a:rPr sz="2800" b="1">
+                <a:solidFill>
+                  <a:srgbClr val="1F2A44"/>
+                </a:solidFill>
+                <a:latin typeface="Nunito Sans"/>
+              </a:rPr>
+              <a:t>Pertenecer:</a:t>
+            </a:r>
+            <a:r>
+              <a:rPr sz="2800" b="0">
+                <a:solidFill>
+                  <a:srgbClr val="1F2A44"/>
+                </a:solidFill>
+                <a:latin typeface="Nunito Sans"/>
+              </a:rPr>
+              <a:t> vestir como mi cuadrilla para ser «de los nuestros»</a:t>
+            </a:r>
+          </a:p>
+          <a:p>
+            <a:pPr>
+              <a:spcAft>
+                <a:spcPts val="1260"/>
+              </a:spcAft>
+            </a:pPr>
+            <a:r>
+              <a:rPr sz="2800" b="1">
+                <a:solidFill>
+                  <a:srgbClr val="E8793A"/>
+                </a:solidFill>
+                <a:latin typeface="Nunito Sans"/>
+              </a:rPr>
+              <a:t>• </a:t>
+            </a:r>
+            <a:r>
+              <a:rPr sz="2800" b="1">
+                <a:solidFill>
+                  <a:srgbClr val="1F2A44"/>
+                </a:solidFill>
+                <a:latin typeface="Nunito Sans"/>
+              </a:rPr>
+              <a:t>Distinguirse:</a:t>
+            </a:r>
+            <a:r>
+              <a:rPr sz="2800" b="0">
+                <a:solidFill>
+                  <a:srgbClr val="1F2A44"/>
+                </a:solidFill>
+                <a:latin typeface="Nunito Sans"/>
+              </a:rPr>
+              <a:t> ser diferente de otros grupos o del resto</a:t>
+            </a:r>
+          </a:p>
+          <a:p>
+            <a:pPr>
+              <a:spcAft>
+                <a:spcPts val="1260"/>
+              </a:spcAft>
+            </a:pPr>
+            <a:r>
+              <a:rPr sz="2800" b="1">
+                <a:solidFill>
+                  <a:srgbClr val="E8793A"/>
+                </a:solidFill>
+                <a:latin typeface="Nunito Sans"/>
+              </a:rPr>
+              <a:t>• </a:t>
+            </a:r>
+            <a:r>
+              <a:rPr sz="2800" b="0">
+                <a:solidFill>
+                  <a:srgbClr val="1F2A44"/>
+                </a:solidFill>
+                <a:latin typeface="Nunito Sans"/>
+              </a:rPr>
+              <a:t>Cuando todos la llevan, ya no distingue… y llega otra moda</a:t>
+            </a:r>
+          </a:p>
+        </p:txBody>
+      </p:sp>
     </p:spTree>
   </p:cSld>
   <p:clrMapOvr>
@@ -7661,7 +7388,7 @@
                 </a:solidFill>
                 <a:latin typeface="Nunito Sans"/>
               </a:rPr>
-              <a:t>BLOQUE 1 · QUÉ ES UNA CULTURA</a:t>
+              <a:t>BLOQUE 1 · MODA E IDENTIDAD</a:t>
             </a:r>
           </a:p>
         </p:txBody>
@@ -7700,310 +7427,234 @@
                 </a:solidFill>
                 <a:latin typeface="Fredoka"/>
               </a:rPr>
-              <a:t>Tres posturas ante la diversidad cultural</a:t>
-            </a:r>
-          </a:p>
-        </p:txBody>
-      </p:sp>
-      <p:graphicFrame>
-        <p:nvGraphicFramePr>
-          <p:cNvPr id="4" name="Table 3"/>
-          <p:cNvGraphicFramePr>
-            <a:graphicFrameLocks noGrp="1"/>
-          </p:cNvGraphicFramePr>
+              <a:t>Presiones y roles en la moda</a:t>
+            </a:r>
+          </a:p>
+        </p:txBody>
+      </p:sp>
+      <p:sp>
+        <p:nvSpPr>
+          <p:cNvPr id="4" name="TextBox 3"/>
+          <p:cNvSpPr txBox="1"/>
           <p:nvPr/>
-        </p:nvGraphicFramePr>
-        <p:xfrm>
-          <a:off x="640000" y="1700000"/>
-          <a:ext cx="10912000" cy="2400000"/>
-        </p:xfrm>
-        <a:graphic>
-          <a:graphicData uri="http://schemas.openxmlformats.org/drawingml/2006/table">
-            <a:tbl>
-              <a:tblPr firstRow="1" bandRow="1">
-                <a:tableStyleId>{5C22544A-7EE6-4342-B048-85BDC9FD1C3A}</a:tableStyleId>
-              </a:tblPr>
-              <a:tblGrid>
-                <a:gridCol w="3637333"/>
-                <a:gridCol w="3637333"/>
-                <a:gridCol w="3637334"/>
-              </a:tblGrid>
-              <a:tr h="600000">
-                <a:tc>
-                  <a:txBody>
-                    <a:bodyPr/>
-                    <a:lstStyle/>
-                    <a:p>
-                      <a:r>
-                        <a:rPr sz="2000" b="1">
-                          <a:solidFill>
-                            <a:srgbClr val="FBF7EF"/>
-                          </a:solidFill>
-                          <a:latin typeface="Fredoka"/>
-                        </a:rPr>
-                        <a:t>Postura</a:t>
-                      </a:r>
-                    </a:p>
-                  </a:txBody>
-                  <a:tcPr>
-                    <a:solidFill>
-                      <a:srgbClr val="1F2A44"/>
-                    </a:solidFill>
-                  </a:tcPr>
-                </a:tc>
-                <a:tc>
-                  <a:txBody>
-                    <a:bodyPr/>
-                    <a:lstStyle/>
-                    <a:p>
-                      <a:r>
-                        <a:rPr sz="2000" b="1">
-                          <a:solidFill>
-                            <a:srgbClr val="FBF7EF"/>
-                          </a:solidFill>
-                          <a:latin typeface="Fredoka"/>
-                        </a:rPr>
-                        <a:t>Qué dice</a:t>
-                      </a:r>
-                    </a:p>
-                  </a:txBody>
-                  <a:tcPr>
-                    <a:solidFill>
-                      <a:srgbClr val="1F2A44"/>
-                    </a:solidFill>
-                  </a:tcPr>
-                </a:tc>
-                <a:tc>
-                  <a:txBody>
-                    <a:bodyPr/>
-                    <a:lstStyle/>
-                    <a:p>
-                      <a:r>
-                        <a:rPr sz="2000" b="1">
-                          <a:solidFill>
-                            <a:srgbClr val="FBF7EF"/>
-                          </a:solidFill>
-                          <a:latin typeface="Fredoka"/>
-                        </a:rPr>
-                        <a:t>Problema o límite</a:t>
-                      </a:r>
-                    </a:p>
-                  </a:txBody>
-                  <a:tcPr>
-                    <a:solidFill>
-                      <a:srgbClr val="1F2A44"/>
-                    </a:solidFill>
-                  </a:tcPr>
-                </a:tc>
-              </a:tr>
-              <a:tr h="600000">
-                <a:tc>
-                  <a:txBody>
-                    <a:bodyPr/>
-                    <a:lstStyle/>
-                    <a:p>
-                      <a:r>
-                        <a:rPr sz="2000" b="1">
-                          <a:solidFill>
-                            <a:srgbClr val="1F2A44"/>
-                          </a:solidFill>
-                          <a:latin typeface="Nunito Sans"/>
-                        </a:rPr>
-                        <a:t>Etnocentrismo</a:t>
-                      </a:r>
-                    </a:p>
-                  </a:txBody>
-                  <a:tcPr>
-                    <a:solidFill>
-                      <a:srgbClr val="FFFFFF"/>
-                    </a:solidFill>
-                  </a:tcPr>
-                </a:tc>
-                <a:tc>
-                  <a:txBody>
-                    <a:bodyPr/>
-                    <a:lstStyle/>
-                    <a:p>
-                      <a:r>
-                        <a:rPr sz="2000" b="0">
-                          <a:solidFill>
-                            <a:srgbClr val="1F2A44"/>
-                          </a:solidFill>
-                          <a:latin typeface="Nunito Sans"/>
-                        </a:rPr>
-                        <a:t>Mi cultura es la medida de todas</a:t>
-                      </a:r>
-                    </a:p>
-                  </a:txBody>
-                  <a:tcPr>
-                    <a:solidFill>
-                      <a:srgbClr val="FFFFFF"/>
-                    </a:solidFill>
-                  </a:tcPr>
-                </a:tc>
-                <a:tc>
-                  <a:txBody>
-                    <a:bodyPr/>
-                    <a:lstStyle/>
-                    <a:p>
-                      <a:r>
-                        <a:rPr sz="2000" b="0">
-                          <a:solidFill>
-                            <a:srgbClr val="1F2A44"/>
-                          </a:solidFill>
-                          <a:latin typeface="Nunito Sans"/>
-                        </a:rPr>
-                        <a:t>Llama «raro» o «malo» a lo que solo es distinto</a:t>
-                      </a:r>
-                    </a:p>
-                  </a:txBody>
-                  <a:tcPr>
-                    <a:solidFill>
-                      <a:srgbClr val="FFFFFF"/>
-                    </a:solidFill>
-                  </a:tcPr>
-                </a:tc>
-              </a:tr>
-              <a:tr h="600000">
-                <a:tc>
-                  <a:txBody>
-                    <a:bodyPr/>
-                    <a:lstStyle/>
-                    <a:p>
-                      <a:r>
-                        <a:rPr sz="2000" b="1">
-                          <a:solidFill>
-                            <a:srgbClr val="1F2A44"/>
-                          </a:solidFill>
-                          <a:latin typeface="Nunito Sans"/>
-                        </a:rPr>
-                        <a:t>Relativismo cultural</a:t>
-                      </a:r>
-                    </a:p>
-                  </a:txBody>
-                  <a:tcPr>
-                    <a:solidFill>
-                      <a:srgbClr val="EAF0F7"/>
-                    </a:solidFill>
-                  </a:tcPr>
-                </a:tc>
-                <a:tc>
-                  <a:txBody>
-                    <a:bodyPr/>
-                    <a:lstStyle/>
-                    <a:p>
-                      <a:r>
-                        <a:rPr sz="2000" b="0">
-                          <a:solidFill>
-                            <a:srgbClr val="1F2A44"/>
-                          </a:solidFill>
-                          <a:latin typeface="Nunito Sans"/>
-                        </a:rPr>
-                        <a:t>Cada costumbre se entiende dentro de su cultura</a:t>
-                      </a:r>
-                    </a:p>
-                  </a:txBody>
-                  <a:tcPr>
-                    <a:solidFill>
-                      <a:srgbClr val="EAF0F7"/>
-                    </a:solidFill>
-                  </a:tcPr>
-                </a:tc>
-                <a:tc>
-                  <a:txBody>
-                    <a:bodyPr/>
-                    <a:lstStyle/>
-                    <a:p>
-                      <a:r>
-                        <a:rPr sz="2000" b="0">
-                          <a:solidFill>
-                            <a:srgbClr val="1F2A44"/>
-                          </a:solidFill>
-                          <a:latin typeface="Nunito Sans"/>
-                        </a:rPr>
-                        <a:t>Llevado al extremo, no se podría criticar nada</a:t>
-                      </a:r>
-                    </a:p>
-                  </a:txBody>
-                  <a:tcPr>
-                    <a:solidFill>
-                      <a:srgbClr val="EAF0F7"/>
-                    </a:solidFill>
-                  </a:tcPr>
-                </a:tc>
-              </a:tr>
-              <a:tr h="600000">
-                <a:tc>
-                  <a:txBody>
-                    <a:bodyPr/>
-                    <a:lstStyle/>
-                    <a:p>
-                      <a:r>
-                        <a:rPr sz="2000" b="1">
-                          <a:solidFill>
-                            <a:srgbClr val="1F2A44"/>
-                          </a:solidFill>
-                          <a:latin typeface="Nunito Sans"/>
-                        </a:rPr>
-                        <a:t>Interculturalidad</a:t>
-                      </a:r>
-                    </a:p>
-                  </a:txBody>
-                  <a:tcPr>
-                    <a:solidFill>
-                      <a:srgbClr val="FFFFFF"/>
-                    </a:solidFill>
-                  </a:tcPr>
-                </a:tc>
-                <a:tc>
-                  <a:txBody>
-                    <a:bodyPr/>
-                    <a:lstStyle/>
-                    <a:p>
-                      <a:r>
-                        <a:rPr sz="2000" b="0">
-                          <a:solidFill>
-                            <a:srgbClr val="1F2A44"/>
-                          </a:solidFill>
-                          <a:latin typeface="Nunito Sans"/>
-                        </a:rPr>
-                        <a:t>Respeto, diálogo y derechos humanos para todos</a:t>
-                      </a:r>
-                    </a:p>
-                  </a:txBody>
-                  <a:tcPr>
-                    <a:solidFill>
-                      <a:srgbClr val="FFFFFF"/>
-                    </a:solidFill>
-                  </a:tcPr>
-                </a:tc>
-                <a:tc>
-                  <a:txBody>
-                    <a:bodyPr/>
-                    <a:lstStyle/>
-                    <a:p>
-                      <a:r>
-                        <a:rPr sz="2000" b="0">
-                          <a:solidFill>
-                            <a:srgbClr val="1F2A44"/>
-                          </a:solidFill>
-                          <a:latin typeface="Nunito Sans"/>
-                        </a:rPr>
-                        <a:t>Exige esfuerzo: conocer al otro y dar razones</a:t>
-                      </a:r>
-                    </a:p>
-                  </a:txBody>
-                  <a:tcPr>
-                    <a:solidFill>
-                      <a:srgbClr val="FFFFFF"/>
-                    </a:solidFill>
-                  </a:tcPr>
-                </a:tc>
-              </a:tr>
-            </a:tbl>
-          </a:graphicData>
-        </a:graphic>
-      </p:graphicFrame>
+        </p:nvSpPr>
+        <p:spPr>
+          <a:xfrm>
+            <a:off x="840000" y="1730000"/>
+            <a:ext cx="10512000" cy="1000000"/>
+          </a:xfrm>
+          <a:prstGeom prst="rect">
+            <a:avLst/>
+          </a:prstGeom>
+          <a:noFill/>
+        </p:spPr>
+        <p:txBody>
+          <a:bodyPr wrap="square" anchor="ctr">
+            <a:spAutoFit/>
+          </a:bodyPr>
+          <a:lstStyle/>
+          <a:p>
+            <a:pPr>
+              <a:spcAft>
+                <a:spcPts val="1080"/>
+              </a:spcAft>
+            </a:pPr>
+            <a:r>
+              <a:rPr sz="2400" b="0">
+                <a:solidFill>
+                  <a:srgbClr val="1F2A44"/>
+                </a:solidFill>
+                <a:latin typeface="Nunito Sans"/>
+              </a:rPr>
+              <a:t>La moda puede ser un juego. También puede apretar:</a:t>
+            </a:r>
+          </a:p>
+        </p:txBody>
+      </p:sp>
+      <p:sp>
+        <p:nvSpPr>
+          <p:cNvPr id="5" name="TextBox 4"/>
+          <p:cNvSpPr txBox="1"/>
+          <p:nvPr/>
+        </p:nvSpPr>
+        <p:spPr>
+          <a:xfrm>
+            <a:off x="640000" y="3000000"/>
+            <a:ext cx="10912000" cy="3458000"/>
+          </a:xfrm>
+          <a:prstGeom prst="rect">
+            <a:avLst/>
+          </a:prstGeom>
+          <a:noFill/>
+        </p:spPr>
+        <p:txBody>
+          <a:bodyPr wrap="square">
+            <a:spAutoFit/>
+          </a:bodyPr>
+          <a:lstStyle/>
+          <a:p>
+            <a:pPr>
+              <a:spcAft>
+                <a:spcPts val="1260"/>
+              </a:spcAft>
+            </a:pPr>
+            <a:r>
+              <a:rPr sz="2800" b="1">
+                <a:solidFill>
+                  <a:srgbClr val="E8793A"/>
+                </a:solidFill>
+                <a:latin typeface="Nunito Sans"/>
+              </a:rPr>
+              <a:t>• </a:t>
+            </a:r>
+            <a:r>
+              <a:rPr sz="2800" b="1">
+                <a:solidFill>
+                  <a:srgbClr val="1F2A44"/>
+                </a:solidFill>
+                <a:latin typeface="Nunito Sans"/>
+              </a:rPr>
+              <a:t>Burlas</a:t>
+            </a:r>
+            <a:r>
+              <a:rPr sz="2800" b="0">
+                <a:solidFill>
+                  <a:srgbClr val="1F2A44"/>
+                </a:solidFill>
+                <a:latin typeface="Nunito Sans"/>
+              </a:rPr>
+              <a:t> a quien no lleva la marca o el estilo «que toca»</a:t>
+            </a:r>
+          </a:p>
+          <a:p>
+            <a:pPr>
+              <a:spcAft>
+                <a:spcPts val="1260"/>
+              </a:spcAft>
+            </a:pPr>
+            <a:r>
+              <a:rPr sz="2800" b="1">
+                <a:solidFill>
+                  <a:srgbClr val="E8793A"/>
+                </a:solidFill>
+                <a:latin typeface="Nunito Sans"/>
+              </a:rPr>
+              <a:t>• </a:t>
+            </a:r>
+            <a:r>
+              <a:rPr sz="2800" b="1">
+                <a:solidFill>
+                  <a:srgbClr val="1F2A44"/>
+                </a:solidFill>
+                <a:latin typeface="Nunito Sans"/>
+              </a:rPr>
+              <a:t>Gasto:</a:t>
+            </a:r>
+            <a:r>
+              <a:rPr sz="2800" b="0">
+                <a:solidFill>
+                  <a:srgbClr val="1F2A44"/>
+                </a:solidFill>
+                <a:latin typeface="Nunito Sans"/>
+              </a:rPr>
+              <a:t> pedir lo que la familia no puede pagar</a:t>
+            </a:r>
+          </a:p>
+          <a:p>
+            <a:pPr>
+              <a:spcAft>
+                <a:spcPts val="1260"/>
+              </a:spcAft>
+            </a:pPr>
+            <a:r>
+              <a:rPr sz="2800" b="1">
+                <a:solidFill>
+                  <a:srgbClr val="E8793A"/>
+                </a:solidFill>
+                <a:latin typeface="Nunito Sans"/>
+              </a:rPr>
+              <a:t>• </a:t>
+            </a:r>
+            <a:r>
+              <a:rPr sz="2800" b="1">
+                <a:solidFill>
+                  <a:srgbClr val="1F2A44"/>
+                </a:solidFill>
+                <a:latin typeface="Nunito Sans"/>
+              </a:rPr>
+              <a:t>Cuerpos retocados</a:t>
+            </a:r>
+            <a:r>
+              <a:rPr sz="2800" b="0">
+                <a:solidFill>
+                  <a:srgbClr val="1F2A44"/>
+                </a:solidFill>
+                <a:latin typeface="Nunito Sans"/>
+              </a:rPr>
+              <a:t> en fotos y anuncios: nadie es así de verdad</a:t>
+            </a:r>
+          </a:p>
+          <a:p>
+            <a:pPr>
+              <a:spcAft>
+                <a:spcPts val="1260"/>
+              </a:spcAft>
+            </a:pPr>
+            <a:r>
+              <a:rPr sz="2800" b="1">
+                <a:solidFill>
+                  <a:srgbClr val="E8793A"/>
+                </a:solidFill>
+                <a:latin typeface="Nunito Sans"/>
+              </a:rPr>
+              <a:t>• </a:t>
+            </a:r>
+            <a:r>
+              <a:rPr sz="2800" b="1">
+                <a:solidFill>
+                  <a:srgbClr val="1F2A44"/>
+                </a:solidFill>
+                <a:latin typeface="Nunito Sans"/>
+              </a:rPr>
+              <a:t>Roles:</a:t>
+            </a:r>
+            <a:r>
+              <a:rPr sz="2800" b="0">
+                <a:solidFill>
+                  <a:srgbClr val="1F2A44"/>
+                </a:solidFill>
+                <a:latin typeface="Nunito Sans"/>
+              </a:rPr>
+              <a:t> «esto es de chicos», «esto es de chicas»</a:t>
+            </a:r>
+          </a:p>
+          <a:p>
+            <a:pPr>
+              <a:spcAft>
+                <a:spcPts val="1260"/>
+              </a:spcAft>
+            </a:pPr>
+            <a:r>
+              <a:rPr sz="2800" b="1">
+                <a:solidFill>
+                  <a:srgbClr val="E8793A"/>
+                </a:solidFill>
+                <a:latin typeface="Nunito Sans"/>
+              </a:rPr>
+              <a:t>• </a:t>
+            </a:r>
+            <a:r>
+              <a:rPr sz="2800" b="0">
+                <a:solidFill>
+                  <a:srgbClr val="1F2A44"/>
+                </a:solidFill>
+                <a:latin typeface="Nunito Sans"/>
+              </a:rPr>
+              <a:t>Publicidad e influencers también empujan: lo vimos en las sesiones 50 y 51</a:t>
+            </a:r>
+          </a:p>
+        </p:txBody>
+      </p:sp>
     </p:spTree>
   </p:cSld>
   <p:clrMapOvr>
